--- a/Algorithms_Flowcharts_Presentation_CLT.pptx
+++ b/Algorithms_Flowcharts_Presentation_CLT.pptx
@@ -4,19 +4,21 @@
   <p:sldMasterIdLst>
     <p:sldMasterId id="2147483648" r:id="rId1"/>
   </p:sldMasterIdLst>
+  <p:notesMasterIdLst>
+    <p:notesMasterId r:id="rId11"/>
+  </p:notesMasterIdLst>
   <p:sldIdLst>
     <p:sldId id="256" r:id="rId2"/>
     <p:sldId id="257" r:id="rId3"/>
-    <p:sldId id="258" r:id="rId4"/>
-    <p:sldId id="259" r:id="rId5"/>
-    <p:sldId id="260" r:id="rId6"/>
-    <p:sldId id="261" r:id="rId7"/>
-    <p:sldId id="262" r:id="rId8"/>
+    <p:sldId id="264" r:id="rId4"/>
+    <p:sldId id="258" r:id="rId5"/>
+    <p:sldId id="266" r:id="rId6"/>
+    <p:sldId id="260" r:id="rId7"/>
+    <p:sldId id="261" r:id="rId8"/>
+    <p:sldId id="265" r:id="rId9"/>
+    <p:sldId id="262" r:id="rId10"/>
   </p:sldIdLst>
-  <p:notesMasterIdLst>
-    <p:notesMasterId r:id="rId9"/>
-  </p:notesMasterIdLst>
-  <p:sldSz cx="9144000" cy="5143500"/>
+  <p:sldSz cx="9144000" cy="5143500" type="screen16x9"/>
   <p:notesSz cx="5143500" cy="9144000"/>
   <p:defaultTextStyle>
     <a:lvl1pPr marL="0" algn="l" defTabSz="914400" rtl="0" eaLnBrk="1" latinLnBrk="0" hangingPunct="1">
@@ -113,33 +115,35 @@
   <p:extLst>
     <p:ext uri="{521415D9-36F7-43E2-AB2F-B90AF26B5E84}">
       <p14:sectionLst xmlns:p14="http://schemas.microsoft.com/office/powerpoint/2010/main">
-        <p14:section name="Opening" id="{368f14da-0f6f-4150-879d-e40656c19ff6}">
+        <p14:section name="Opening" id="{368F14DA-0F6F-4150-879D-E40656C19FF6}">
           <p14:sldIdLst>
             <p14:sldId id="256"/>
           </p14:sldIdLst>
         </p14:section>
-        <p14:section name="Problem statement" id="{24cdee6f-8c33-f8a0-dd51-e1c93662afb7}">
+        <p14:section name="Problem statement" id="{24CDEE6F-8C33-F8A0-DD51-E1C93662AFB7}">
           <p14:sldIdLst>
             <p14:sldId id="257"/>
+            <p14:sldId id="264"/>
           </p14:sldIdLst>
         </p14:section>
-        <p14:section name="Design process" id="{16f78654-aa52-b0b3-1fb6-98f6c7eab084}">
+        <p14:section name="Design process" id="{16F78654-AA52-B0B3-1FB6-98F6C7EAB084}">
           <p14:sldIdLst>
             <p14:sldId id="258"/>
           </p14:sldIdLst>
         </p14:section>
-        <p14:section name="Live demonstration" id="{95454124-398a-adac-1a34-2c2486dba413}">
+        <p14:section name="Live demonstration" id="{95454124-398A-ADAC-1A34-2C2486DBA413}">
           <p14:sldIdLst>
-            <p14:sldId id="259"/>
+            <p14:sldId id="266"/>
           </p14:sldIdLst>
         </p14:section>
-        <p14:section name="Impact" id="{e2a70f58-cdc5-03cd-3738-06f9dfc5db56}">
+        <p14:section name="Impact" id="{E2A70F58-CDC5-03CD-3738-06F9DFC5DB56}">
           <p14:sldIdLst>
             <p14:sldId id="260"/>
             <p14:sldId id="261"/>
+            <p14:sldId id="265"/>
           </p14:sldIdLst>
         </p14:section>
-        <p14:section name="Questions" id="{aa7b694e-de77-f1db-300f-3f07608bbc2d}">
+        <p14:section name="Questions" id="{AA7B694E-DE77-F1DB-300F-3F07608BBC2D}">
           <p14:sldIdLst>
             <p14:sldId id="262"/>
           </p14:sldIdLst>
@@ -175,234 +179,10 @@
           <a:chExt cx="0" cy="0"/>
         </a:xfrm>
       </p:grpSpPr>
-      <p:sp>
-        <p:nvSpPr>
-          <p:cNvPr id="2" name="Header Placeholder 1"/>
-          <p:cNvSpPr>
-            <a:spLocks noGrp="1"/>
-          </p:cNvSpPr>
-          <p:nvPr>
-            <p:ph type="hdr" sz="quarter"/>
-          </p:nvPr>
-        </p:nvSpPr>
-        <p:spPr>
-          <a:xfrm>
-            <a:off x="0" y="0"/>
-            <a:ext cx="2971800" cy="458788"/>
-          </a:xfrm>
-          <a:prstGeom prst="rect">
-            <a:avLst/>
-          </a:prstGeom>
-        </p:spPr>
-        <p:txBody>
-          <a:bodyPr vert="horz" lIns="91440" tIns="45720" rIns="91440" bIns="45720" rtlCol="0"/>
-          <a:lstStyle>
-            <a:lvl1pPr algn="l">
-              <a:defRPr sz="1200"/>
-            </a:lvl1pPr>
-          </a:lstStyle>
-          <a:p>
-            <a:endParaRPr lang="en-US"/>
-          </a:p>
-        </p:txBody>
-      </p:sp>
-      <p:sp>
-        <p:nvSpPr>
-          <p:cNvPr id="3" name="Date Placeholder 2"/>
-          <p:cNvSpPr>
-            <a:spLocks noGrp="1"/>
-          </p:cNvSpPr>
-          <p:nvPr>
-            <p:ph type="dt" idx="1"/>
-          </p:nvPr>
-        </p:nvSpPr>
-        <p:spPr>
-          <a:xfrm>
-            <a:off x="3884613" y="0"/>
-            <a:ext cx="2971800" cy="458788"/>
-          </a:xfrm>
-          <a:prstGeom prst="rect">
-            <a:avLst/>
-          </a:prstGeom>
-        </p:spPr>
-        <p:txBody>
-          <a:bodyPr vert="horz" lIns="91440" tIns="45720" rIns="91440" bIns="45720" rtlCol="0"/>
-          <a:lstStyle>
-            <a:lvl1pPr algn="r">
-              <a:defRPr sz="1200"/>
-            </a:lvl1pPr>
-          </a:lstStyle>
-          <a:p>
-            <a:fld id="{5282F153-3F37-0F45-9E97-73ACFA13230C}" type="datetimeFigureOut">
-              <a:rPr lang="en-US"/>
-              <a:t>7/23/19</a:t>
-            </a:fld>
-            <a:endParaRPr lang="en-US"/>
-          </a:p>
-        </p:txBody>
-      </p:sp>
-      <p:sp>
-        <p:nvSpPr>
-          <p:cNvPr id="4" name="Slide Image Placeholder 3"/>
-          <p:cNvSpPr>
-            <a:spLocks noGrp="1" noRot="1" noChangeAspect="1"/>
-          </p:cNvSpPr>
-          <p:nvPr>
-            <p:ph type="sldImg" idx="2"/>
-          </p:nvPr>
-        </p:nvSpPr>
-        <p:spPr>
-          <a:xfrm>
-            <a:off x="685800" y="1143000"/>
-            <a:ext cx="5486400" cy="3086100"/>
-          </a:xfrm>
-          <a:prstGeom prst="rect">
-            <a:avLst/>
-          </a:prstGeom>
-          <a:noFill/>
-          <a:ln w="12700">
-            <a:solidFill>
-              <a:prstClr val="black"/>
-            </a:solidFill>
-          </a:ln>
-        </p:spPr>
-        <p:txBody>
-          <a:bodyPr vert="horz" lIns="91440" tIns="45720" rIns="91440" bIns="45720" rtlCol="0" anchor="ctr"/>
-          <a:lstStyle/>
-          <a:p>
-            <a:endParaRPr lang="en-US"/>
-          </a:p>
-        </p:txBody>
-      </p:sp>
-      <p:sp>
-        <p:nvSpPr>
-          <p:cNvPr id="5" name="Notes Placeholder 4"/>
-          <p:cNvSpPr>
-            <a:spLocks noGrp="1"/>
-          </p:cNvSpPr>
-          <p:nvPr>
-            <p:ph type="body" sz="quarter" idx="3"/>
-          </p:nvPr>
-        </p:nvSpPr>
-        <p:spPr>
-          <a:xfrm>
-            <a:off x="685800" y="4400550"/>
-            <a:ext cx="5486400" cy="3600450"/>
-          </a:xfrm>
-          <a:prstGeom prst="rect">
-            <a:avLst/>
-          </a:prstGeom>
-        </p:spPr>
-        <p:txBody>
-          <a:bodyPr vert="horz" lIns="91440" tIns="45720" rIns="91440" bIns="45720" rtlCol="0"/>
-          <a:lstStyle/>
-          <a:p>
-            <a:pPr lvl="0"/>
-            <a:r>
-              <a:rPr lang="en-US"/>
-              <a:t>Click to edit Master text styles</a:t>
-            </a:r>
-          </a:p>
-          <a:p>
-            <a:pPr lvl="1"/>
-            <a:r>
-              <a:rPr lang="en-US"/>
-              <a:t>Second level</a:t>
-            </a:r>
-          </a:p>
-          <a:p>
-            <a:pPr lvl="2"/>
-            <a:r>
-              <a:rPr lang="en-US"/>
-              <a:t>Third level</a:t>
-            </a:r>
-          </a:p>
-          <a:p>
-            <a:pPr lvl="3"/>
-            <a:r>
-              <a:rPr lang="en-US"/>
-              <a:t>Fourth level</a:t>
-            </a:r>
-          </a:p>
-          <a:p>
-            <a:pPr lvl="4"/>
-            <a:r>
-              <a:rPr lang="en-US"/>
-              <a:t>Fifth level</a:t>
-            </a:r>
-          </a:p>
-        </p:txBody>
-      </p:sp>
-      <p:sp>
-        <p:nvSpPr>
-          <p:cNvPr id="6" name="Footer Placeholder 5"/>
-          <p:cNvSpPr>
-            <a:spLocks noGrp="1"/>
-          </p:cNvSpPr>
-          <p:nvPr>
-            <p:ph type="ftr" sz="quarter" idx="4"/>
-          </p:nvPr>
-        </p:nvSpPr>
-        <p:spPr>
-          <a:xfrm>
-            <a:off x="0" y="8685213"/>
-            <a:ext cx="2971800" cy="458787"/>
-          </a:xfrm>
-          <a:prstGeom prst="rect">
-            <a:avLst/>
-          </a:prstGeom>
-        </p:spPr>
-        <p:txBody>
-          <a:bodyPr vert="horz" lIns="91440" tIns="45720" rIns="91440" bIns="45720" rtlCol="0" anchor="b"/>
-          <a:lstStyle>
-            <a:lvl1pPr algn="l">
-              <a:defRPr sz="1200"/>
-            </a:lvl1pPr>
-          </a:lstStyle>
-          <a:p>
-            <a:endParaRPr lang="en-US"/>
-          </a:p>
-        </p:txBody>
-      </p:sp>
-      <p:sp>
-        <p:nvSpPr>
-          <p:cNvPr id="7" name="Slide Number Placeholder 6"/>
-          <p:cNvSpPr>
-            <a:spLocks noGrp="1"/>
-          </p:cNvSpPr>
-          <p:nvPr>
-            <p:ph type="sldNum" sz="quarter" idx="5"/>
-          </p:nvPr>
-        </p:nvSpPr>
-        <p:spPr>
-          <a:xfrm>
-            <a:off x="3884613" y="8685213"/>
-            <a:ext cx="2971800" cy="458787"/>
-          </a:xfrm>
-          <a:prstGeom prst="rect">
-            <a:avLst/>
-          </a:prstGeom>
-        </p:spPr>
-        <p:txBody>
-          <a:bodyPr vert="horz" lIns="91440" tIns="45720" rIns="91440" bIns="45720" rtlCol="0" anchor="b"/>
-          <a:lstStyle>
-            <a:lvl1pPr algn="r">
-              <a:defRPr sz="1200"/>
-            </a:lvl1pPr>
-          </a:lstStyle>
-          <a:p>
-            <a:fld id="{CE5E9CC1-C706-0F49-92D6-E571CC5EEA8F}" type="slidenum">
-              <a:rPr lang="en-US"/>
-              <a:t>‹#›</a:t>
-            </a:fld>
-            <a:endParaRPr lang="en-US"/>
-          </a:p>
-        </p:txBody>
-      </p:sp>
     </p:spTree>
     <p:extLst>
       <p:ext uri="{BB962C8B-B14F-4D97-AF65-F5344CB8AC3E}">
-        <p14:creationId xmlns:p14="http://schemas.microsoft.com/office/powerpoint/2010/main" val="1024086991"/>
+        <p14:creationId xmlns:p14="http://schemas.microsoft.com/office/powerpoint/2010/main" val="1256608120"/>
       </p:ext>
     </p:extLst>
   </p:cSld>
@@ -550,7 +330,6 @@
               <a:rPr lang="en-US" dirty="0"/>
               <a:t>Introduce the group and topic. Hand to the first speaker.</a:t>
             </a:r>
-            <a:endParaRPr lang="en-US" dirty="0"/>
           </a:p>
         </p:txBody>
       </p:sp>
@@ -638,7 +417,6 @@
               <a:rPr lang="en-US" dirty="0"/>
               <a:t>0:00–1:30. Lead with two or three gaps, not all six. End on: teachers need a ready model they can run with limited ICT skills.</a:t>
             </a:r>
-            <a:endParaRPr lang="en-US" dirty="0"/>
           </a:p>
         </p:txBody>
       </p:sp>
@@ -683,7 +461,13 @@
   <p:cSld>
     <p:spTree>
       <p:nvGrpSpPr>
-        <p:cNvPr id="1" name=""/>
+        <p:cNvPr id="1" name="">
+          <a:extLst>
+            <a:ext uri="{FF2B5EF4-FFF2-40B4-BE49-F238E27FC236}">
+              <a16:creationId xmlns:a16="http://schemas.microsoft.com/office/drawing/2014/main" id="{A62CD6E2-1AE0-833B-6652-B92C03ABD61D}"/>
+            </a:ext>
+          </a:extLst>
+        </p:cNvPr>
         <p:cNvGrpSpPr/>
         <p:nvPr/>
       </p:nvGrpSpPr>
@@ -697,7 +481,13 @@
       </p:grpSpPr>
       <p:sp>
         <p:nvSpPr>
-          <p:cNvPr id="2" name="Slide Image Placeholder 1"/>
+          <p:cNvPr id="2" name="Slide Image Placeholder 1">
+            <a:extLst>
+              <a:ext uri="{FF2B5EF4-FFF2-40B4-BE49-F238E27FC236}">
+                <a16:creationId xmlns:a16="http://schemas.microsoft.com/office/drawing/2014/main" id="{7728ECE8-B11E-CC43-5585-5F7E82D76ECF}"/>
+              </a:ext>
+            </a:extLst>
+          </p:cNvPr>
           <p:cNvSpPr>
             <a:spLocks noGrp="1" noRot="1" noChangeAspect="1"/>
           </p:cNvSpPr>
@@ -709,7 +499,13 @@
       </p:sp>
       <p:sp>
         <p:nvSpPr>
-          <p:cNvPr id="3" name="Notes Placeholder 2"/>
+          <p:cNvPr id="3" name="Notes Placeholder 2">
+            <a:extLst>
+              <a:ext uri="{FF2B5EF4-FFF2-40B4-BE49-F238E27FC236}">
+                <a16:creationId xmlns:a16="http://schemas.microsoft.com/office/drawing/2014/main" id="{43819965-866B-F203-4E7A-E3887747A43F}"/>
+              </a:ext>
+            </a:extLst>
+          </p:cNvPr>
           <p:cNvSpPr>
             <a:spLocks noGrp="1"/>
           </p:cNvSpPr>
@@ -724,15 +520,20 @@
           <a:p>
             <a:r>
               <a:rPr lang="en-US" dirty="0"/>
-              <a:t>1:30–3:30. Say why we integrated coding, show the early Lesson 2 draft versus the final, and name the idea we dropped.</a:t>
-            </a:r>
-            <a:endParaRPr lang="en-US" dirty="0"/>
-          </a:p>
-        </p:txBody>
-      </p:sp>
-      <p:sp>
-        <p:nvSpPr>
-          <p:cNvPr id="4" name="Slide Number Placeholder 3"/>
+              <a:t>1:00–1:30 (about 30 seconds). Everything is in one GitHub repo. One short phrase per card: learner material, teacher guide, assessment, the story game, the open licence. Point to the QR code and end on: free to download, adapt and share.</a:t>
+            </a:r>
+          </a:p>
+        </p:txBody>
+      </p:sp>
+      <p:sp>
+        <p:nvSpPr>
+          <p:cNvPr id="4" name="Slide Number Placeholder 3">
+            <a:extLst>
+              <a:ext uri="{FF2B5EF4-FFF2-40B4-BE49-F238E27FC236}">
+                <a16:creationId xmlns:a16="http://schemas.microsoft.com/office/drawing/2014/main" id="{41FFDFE3-3285-E724-1C43-5FC989F8013D}"/>
+              </a:ext>
+            </a:extLst>
+          </p:cNvPr>
           <p:cNvSpPr>
             <a:spLocks noGrp="1"/>
           </p:cNvSpPr>
@@ -756,7 +557,7 @@
     </p:spTree>
     <p:extLst>
       <p:ext uri="{BB962C8B-B14F-4D97-AF65-F5344CB8AC3E}">
-        <p14:creationId xmlns:p14="http://schemas.microsoft.com/office/powerpoint/2010/main" val="1024086991"/>
+        <p14:creationId xmlns:p14="http://schemas.microsoft.com/office/powerpoint/2010/main" val="3290531707"/>
       </p:ext>
     </p:extLst>
   </p:cSld>
@@ -812,9 +613,8 @@
           <a:p>
             <a:r>
               <a:rPr lang="en-US" dirty="0"/>
-              <a:t>3:30–9:30 (about 6 min). Camilla about 2, CJ about 1, Liam about 3. Screenshots and a screen recording ready as backup.</a:t>
-            </a:r>
-            <a:endParaRPr lang="en-US" dirty="0"/>
+              <a:t>1:30–3:30. Say why we integrated coding, show the early Lesson 2 draft versus the final, and name the idea we dropped.</a:t>
+            </a:r>
           </a:p>
         </p:txBody>
       </p:sp>
@@ -900,9 +700,8 @@
           <a:p>
             <a:r>
               <a:rPr lang="en-US" dirty="0"/>
-              <a:t>9:30–10:30. Walk the table quickly. Management is a partial answer: a principal can adopt it without a coordinator.</a:t>
-            </a:r>
-            <a:endParaRPr lang="en-US" dirty="0"/>
+              <a:t>3:30–9:30 (about 6 min). Camilla about 2, Thabo about 1, Liam about 3. Screenshots and a screen recording ready as backup.</a:t>
+            </a:r>
           </a:p>
         </p:txBody>
       </p:sp>
@@ -988,9 +787,8 @@
           <a:p>
             <a:r>
               <a:rPr lang="en-US" dirty="0"/>
-              <a:t>10:30–11:30. Cost, infrastructure, language. Close on the honest next step: not yet piloted.</a:t>
-            </a:r>
-            <a:endParaRPr lang="en-US" dirty="0"/>
+              <a:t>9:30–10:30. Walk the table quickly. Management is a partial answer: a principal can adopt it without a coordinator.</a:t>
+            </a:r>
           </a:p>
         </p:txBody>
       </p:sp>
@@ -1076,9 +874,8 @@
           <a:p>
             <a:r>
               <a:rPr lang="en-US" dirty="0"/>
-              <a:t>11:30–15:00. Every member answers. Prepare: why games, why Setswana, what is not yet tested, how a school with no internet uses it.</a:t>
-            </a:r>
-            <a:endParaRPr lang="en-US" dirty="0"/>
+              <a:t>10:30–11:30. Cost, infrastructure, language. Close on the honest next step: not yet piloted.</a:t>
+            </a:r>
           </a:p>
         </p:txBody>
       </p:sp>
@@ -1100,6 +897,93 @@
             <a:fld id="{F7021451-1387-4CA6-816F-3879F97B5CBC}" type="slidenum">
               <a:rPr lang="en-US"/>
               <a:t>7</a:t>
+            </a:fld>
+            <a:endParaRPr lang="en-US"/>
+          </a:p>
+        </p:txBody>
+      </p:sp>
+    </p:spTree>
+    <p:extLst>
+      <p:ext uri="{BB962C8B-B14F-4D97-AF65-F5344CB8AC3E}">
+        <p14:creationId xmlns:p14="http://schemas.microsoft.com/office/powerpoint/2010/main" val="1024086991"/>
+      </p:ext>
+    </p:extLst>
+  </p:cSld>
+  <p:clrMapOvr>
+    <a:masterClrMapping/>
+  </p:clrMapOvr>
+</p:notes>
+</file>
+
+<file path=ppt/notesSlides/notesSlide8.xml><?xml version="1.0" encoding="utf-8"?>
+<p:notes xmlns:a="http://schemas.openxmlformats.org/drawingml/2006/main" xmlns:r="http://schemas.openxmlformats.org/officeDocument/2006/relationships" xmlns:p="http://schemas.openxmlformats.org/presentationml/2006/main">
+  <p:cSld>
+    <p:spTree>
+      <p:nvGrpSpPr>
+        <p:cNvPr id="1" name=""/>
+        <p:cNvGrpSpPr/>
+        <p:nvPr/>
+      </p:nvGrpSpPr>
+      <p:grpSpPr>
+        <a:xfrm>
+          <a:off x="0" y="0"/>
+          <a:ext cx="0" cy="0"/>
+          <a:chOff x="0" y="0"/>
+          <a:chExt cx="0" cy="0"/>
+        </a:xfrm>
+      </p:grpSpPr>
+      <p:sp>
+        <p:nvSpPr>
+          <p:cNvPr id="2" name="Slide Image Placeholder 1"/>
+          <p:cNvSpPr>
+            <a:spLocks noGrp="1" noRot="1" noChangeAspect="1"/>
+          </p:cNvSpPr>
+          <p:nvPr>
+            <p:ph type="sldImg"/>
+          </p:nvPr>
+        </p:nvSpPr>
+        <p:spPr/>
+      </p:sp>
+      <p:sp>
+        <p:nvSpPr>
+          <p:cNvPr id="3" name="Notes Placeholder 2"/>
+          <p:cNvSpPr>
+            <a:spLocks noGrp="1"/>
+          </p:cNvSpPr>
+          <p:nvPr>
+            <p:ph type="body" idx="1"/>
+          </p:nvPr>
+        </p:nvSpPr>
+        <p:spPr/>
+        <p:txBody>
+          <a:bodyPr/>
+          <a:lstStyle/>
+          <a:p>
+            <a:r>
+              <a:rPr lang="en-US" dirty="0"/>
+              <a:t>11:30–15:00. Every member answers. Prepare: why games, why Setswana, what is not yet tested, how a school with no internet uses it.</a:t>
+            </a:r>
+          </a:p>
+        </p:txBody>
+      </p:sp>
+      <p:sp>
+        <p:nvSpPr>
+          <p:cNvPr id="4" name="Slide Number Placeholder 3"/>
+          <p:cNvSpPr>
+            <a:spLocks noGrp="1"/>
+          </p:cNvSpPr>
+          <p:nvPr>
+            <p:ph type="sldNum" sz="quarter" idx="10"/>
+          </p:nvPr>
+        </p:nvSpPr>
+        <p:spPr/>
+        <p:txBody>
+          <a:bodyPr/>
+          <a:lstStyle/>
+          <a:p>
+            <a:fld id="{F7021451-1387-4CA6-816F-3879F97B5CBC}" type="slidenum">
+              <a:rPr lang="en-US"/>
+              <a:t>9</a:t>
             </a:fld>
             <a:endParaRPr lang="en-US"/>
           </a:p>
@@ -1156,6 +1040,7 @@
         <a:solidFill>
           <a:schemeClr val="bg1"/>
         </a:solidFill>
+        <a:effectLst/>
       </p:bgPr>
     </p:bg>
     <p:spTree>
@@ -1175,9 +1060,11 @@
       <p:sp>
         <p:nvSpPr>
           <p:cNvPr id="2" name="Text 0"/>
-          <p:cNvSpPr/>
+          <p:cNvSpPr>
+            <a:spLocks noGrp="1"/>
+          </p:cNvSpPr>
           <p:nvPr>
-            <p:ph idx="100" type="title" hasCustomPrompt="1"/>
+            <p:ph type="title" idx="100" hasCustomPrompt="1"/>
           </p:nvPr>
         </p:nvSpPr>
         <p:spPr>
@@ -1194,7 +1081,7 @@
         <p:txBody>
           <a:bodyPr wrap="square" rtlCol="0"/>
           <a:lstStyle>
-            <a:lvl1pPr algn="l" indent="0" marL="0">
+            <a:lvl1pPr marL="0" indent="0" algn="l">
               <a:buNone/>
               <a:defRPr lang="en-US" sz="3400" b="1" dirty="0">
                 <a:solidFill>
@@ -1204,7 +1091,7 @@
             </a:lvl1pPr>
           </a:lstStyle>
           <a:p>
-            <a:pPr algn="l" indent="0" marL="0">
+            <a:pPr marL="0" indent="0" algn="l">
               <a:buNone/>
             </a:pPr>
             <a:endParaRPr lang="en-US" sz="3400" dirty="0"/>
@@ -1232,7 +1119,7 @@
           <a:bodyPr wrap="square" lIns="0" tIns="0" rIns="0" bIns="0" rtlCol="0" anchor="ctr"/>
           <a:lstStyle/>
           <a:p>
-            <a:pPr indent="0" marL="0">
+            <a:pPr marL="0" indent="0">
               <a:buNone/>
             </a:pPr>
             <a:r>
@@ -1267,7 +1154,7 @@
           </a:prstGeom>
           <a:extLst>
             <a:ext uri="{C572A759-6A51-4108-AA02-DFA0A04FC94B}">
-              <ma14:wrappingTextBoxFlag xmlns:ma14="http://schemas.microsoft.com/office/mac/drawingml/2011/main" val="0"/>
+              <ma14:wrappingTextBoxFlag xmlns:ma14="http://schemas.microsoft.com/office/mac/drawingml/2011/main" xmlns="" val="0"/>
             </a:ext>
           </a:extLst>
         </p:spPr>
@@ -1285,8 +1172,8 @@
           <a:p>
             <a:pPr algn="l"/>
             <a:fld id="{F7021451-1387-4CA6-816F-3879F97B5CBC}" type="slidenum">
-              <a:rPr b="0" lang="en-US"/>
-              <a:t>1002</a:t>
+              <a:rPr lang="en-US" b="0"/>
+              <a:t>‹#›</a:t>
             </a:fld>
             <a:endParaRPr lang="en-US"/>
           </a:p>
@@ -1308,6 +1195,7 @@
         <a:solidFill>
           <a:schemeClr val="accent3"/>
         </a:solidFill>
+        <a:effectLst/>
       </p:bgPr>
     </p:bg>
     <p:spTree>
@@ -1327,9 +1215,11 @@
       <p:sp>
         <p:nvSpPr>
           <p:cNvPr id="2" name="Text 0"/>
-          <p:cNvSpPr/>
+          <p:cNvSpPr>
+            <a:spLocks noGrp="1"/>
+          </p:cNvSpPr>
           <p:nvPr>
-            <p:ph idx="100" type="title" hasCustomPrompt="1"/>
+            <p:ph type="title" idx="100" hasCustomPrompt="1"/>
           </p:nvPr>
         </p:nvSpPr>
         <p:spPr>
@@ -1346,7 +1236,7 @@
         <p:txBody>
           <a:bodyPr wrap="square" rtlCol="0"/>
           <a:lstStyle>
-            <a:lvl1pPr algn="l" indent="0" marL="0">
+            <a:lvl1pPr marL="0" indent="0" algn="l">
               <a:buNone/>
               <a:defRPr lang="en-US" sz="4000" b="1" dirty="0">
                 <a:solidFill>
@@ -1356,7 +1246,7 @@
             </a:lvl1pPr>
           </a:lstStyle>
           <a:p>
-            <a:pPr algn="l" indent="0" marL="0">
+            <a:pPr marL="0" indent="0" algn="l">
               <a:buNone/>
             </a:pPr>
             <a:endParaRPr lang="en-US" sz="4000" dirty="0"/>
@@ -1374,6 +1264,11 @@
 <file path=ppt/slideMasters/slideMaster1.xml><?xml version="1.0" encoding="utf-8"?>
 <p:sldMaster xmlns:a="http://schemas.openxmlformats.org/drawingml/2006/main" xmlns:r="http://schemas.openxmlformats.org/officeDocument/2006/relationships" xmlns:p="http://schemas.openxmlformats.org/presentationml/2006/main">
   <p:cSld>
+    <p:bg>
+      <p:bgRef idx="1001">
+        <a:schemeClr val="bg1"/>
+      </p:bgRef>
+    </p:bg>
     <p:spTree>
       <p:nvGrpSpPr>
         <p:cNvPr id="1" name=""/>
@@ -1408,7 +1303,7 @@
           </a:prstGeom>
           <a:extLst>
             <a:ext uri="{C572A759-6A51-4108-AA02-DFA0A04FC94B}">
-              <ma14:wrappingTextBoxFlag xmlns:ma14="http://schemas.microsoft.com/office/mac/drawingml/2011/main" val="0"/>
+              <ma14:wrappingTextBoxFlag xmlns:ma14="http://schemas.microsoft.com/office/mac/drawingml/2011/main" xmlns="" val="0"/>
             </a:ext>
           </a:extLst>
         </p:spPr>
@@ -1426,8 +1321,8 @@
           <a:p>
             <a:pPr algn="l"/>
             <a:fld id="{F7021451-1387-4CA6-816F-3879F97B5CBC}" type="slidenum">
-              <a:rPr b="0" lang="en-US"/>
-              <a:t>null</a:t>
+              <a:rPr lang="en-US" b="0"/>
+              <a:t>‹#›</a:t>
             </a:fld>
             <a:endParaRPr lang="en-US"/>
           </a:p>
@@ -1715,9 +1610,11 @@
       <p:sp>
         <p:nvSpPr>
           <p:cNvPr id="2" name="Text 0"/>
-          <p:cNvSpPr/>
+          <p:cNvSpPr>
+            <a:spLocks noGrp="1"/>
+          </p:cNvSpPr>
           <p:nvPr>
-            <p:ph idx="100" type="title" hasCustomPrompt="1"/>
+            <p:ph type="title" idx="100" hasCustomPrompt="1"/>
           </p:nvPr>
         </p:nvSpPr>
         <p:spPr>
@@ -1735,7 +1632,7 @@
           <a:bodyPr wrap="square" lIns="0" tIns="0" rIns="0" bIns="0" rtlCol="0" anchor="t"/>
           <a:lstStyle/>
           <a:p>
-            <a:pPr algn="l" indent="0" marL="0">
+            <a:pPr marL="0" indent="0" algn="l">
               <a:buNone/>
             </a:pPr>
             <a:r>
@@ -1771,7 +1668,7 @@
           <a:bodyPr wrap="square" lIns="0" tIns="0" rIns="0" bIns="0" rtlCol="0" anchor="ctr"/>
           <a:lstStyle/>
           <a:p>
-            <a:pPr indent="0" marL="0">
+            <a:pPr marL="0" indent="0">
               <a:buNone/>
             </a:pPr>
             <a:r>
@@ -1810,7 +1707,7 @@
           <a:bodyPr wrap="square" lIns="0" tIns="0" rIns="0" bIns="0" rtlCol="0" anchor="ctr"/>
           <a:lstStyle/>
           <a:p>
-            <a:pPr indent="0" marL="0">
+            <a:pPr marL="0" indent="0">
               <a:buNone/>
             </a:pPr>
             <a:r>
@@ -1852,6 +1749,13 @@
             <a:prstDash val="solid"/>
           </a:ln>
         </p:spPr>
+        <p:txBody>
+          <a:bodyPr/>
+          <a:lstStyle/>
+          <a:p>
+            <a:endParaRPr lang="en-US"/>
+          </a:p>
+        </p:txBody>
       </p:sp>
       <p:sp>
         <p:nvSpPr>
@@ -1877,6 +1781,13 @@
             <a:prstDash val="solid"/>
           </a:ln>
         </p:spPr>
+        <p:txBody>
+          <a:bodyPr/>
+          <a:lstStyle/>
+          <a:p>
+            <a:endParaRPr lang="en-US"/>
+          </a:p>
+        </p:txBody>
       </p:sp>
       <p:sp>
         <p:nvSpPr>
@@ -1899,7 +1810,7 @@
           <a:bodyPr wrap="square" lIns="0" tIns="0" rIns="0" bIns="0" rtlCol="0" anchor="ctr"/>
           <a:lstStyle/>
           <a:p>
-            <a:pPr indent="0" marL="0">
+            <a:pPr marL="0" indent="0">
               <a:buNone/>
             </a:pPr>
             <a:r>
@@ -1945,9 +1856,11 @@
       <p:sp>
         <p:nvSpPr>
           <p:cNvPr id="2" name="Text 0"/>
-          <p:cNvSpPr/>
+          <p:cNvSpPr>
+            <a:spLocks noGrp="1"/>
+          </p:cNvSpPr>
           <p:nvPr>
-            <p:ph idx="100" type="title" hasCustomPrompt="1"/>
+            <p:ph type="title" idx="100" hasCustomPrompt="1"/>
           </p:nvPr>
         </p:nvSpPr>
         <p:spPr>
@@ -1965,7 +1878,7 @@
           <a:bodyPr wrap="square" lIns="0" tIns="0" rIns="0" bIns="0" rtlCol="0" anchor="ctr"/>
           <a:lstStyle/>
           <a:p>
-            <a:pPr algn="l" indent="0" marL="0">
+            <a:pPr marL="0" indent="0" algn="l">
               <a:buNone/>
             </a:pPr>
             <a:r>
@@ -2001,7 +1914,7 @@
           <a:bodyPr wrap="square" lIns="0" tIns="0" rIns="0" bIns="0" rtlCol="0" anchor="ctr"/>
           <a:lstStyle/>
           <a:p>
-            <a:pPr indent="0" marL="0">
+            <a:pPr marL="0" indent="0">
               <a:buNone/>
             </a:pPr>
             <a:r>
@@ -2045,6 +1958,13 @@
             <a:prstDash val="solid"/>
           </a:ln>
         </p:spPr>
+        <p:txBody>
+          <a:bodyPr/>
+          <a:lstStyle/>
+          <a:p>
+            <a:endParaRPr lang="en-US"/>
+          </a:p>
+        </p:txBody>
       </p:sp>
       <p:sp>
         <p:nvSpPr>
@@ -2072,6 +1992,13 @@
             <a:prstDash val="solid"/>
           </a:ln>
         </p:spPr>
+        <p:txBody>
+          <a:bodyPr/>
+          <a:lstStyle/>
+          <a:p>
+            <a:endParaRPr lang="en-US"/>
+          </a:p>
+        </p:txBody>
       </p:sp>
       <p:sp>
         <p:nvSpPr>
@@ -2099,6 +2026,13 @@
             <a:prstDash val="solid"/>
           </a:ln>
         </p:spPr>
+        <p:txBody>
+          <a:bodyPr/>
+          <a:lstStyle/>
+          <a:p>
+            <a:endParaRPr lang="en-US"/>
+          </a:p>
+        </p:txBody>
       </p:sp>
       <p:sp>
         <p:nvSpPr>
@@ -2121,7 +2055,7 @@
           <a:bodyPr wrap="square" lIns="0" tIns="0" rIns="0" bIns="0" rtlCol="0" anchor="ctr"/>
           <a:lstStyle/>
           <a:p>
-            <a:pPr indent="0" marL="0">
+            <a:pPr marL="0" indent="0">
               <a:buNone/>
             </a:pPr>
             <a:r>
@@ -2160,7 +2094,7 @@
           <a:bodyPr wrap="square" lIns="0" tIns="0" rIns="0" bIns="0" rtlCol="0" anchor="ctr"/>
           <a:lstStyle/>
           <a:p>
-            <a:pPr indent="0" marL="0">
+            <a:pPr marL="0" indent="0">
               <a:buNone/>
             </a:pPr>
             <a:r>
@@ -2204,6 +2138,13 @@
             <a:prstDash val="solid"/>
           </a:ln>
         </p:spPr>
+        <p:txBody>
+          <a:bodyPr/>
+          <a:lstStyle/>
+          <a:p>
+            <a:endParaRPr lang="en-US"/>
+          </a:p>
+        </p:txBody>
       </p:sp>
       <p:sp>
         <p:nvSpPr>
@@ -2231,6 +2172,13 @@
             <a:prstDash val="solid"/>
           </a:ln>
         </p:spPr>
+        <p:txBody>
+          <a:bodyPr/>
+          <a:lstStyle/>
+          <a:p>
+            <a:endParaRPr lang="en-US"/>
+          </a:p>
+        </p:txBody>
       </p:sp>
       <p:sp>
         <p:nvSpPr>
@@ -2256,6 +2204,13 @@
             <a:prstDash val="solid"/>
           </a:ln>
         </p:spPr>
+        <p:txBody>
+          <a:bodyPr/>
+          <a:lstStyle/>
+          <a:p>
+            <a:endParaRPr lang="en-US"/>
+          </a:p>
+        </p:txBody>
       </p:sp>
       <p:sp>
         <p:nvSpPr>
@@ -2278,7 +2233,7 @@
           <a:bodyPr wrap="square" lIns="0" tIns="0" rIns="0" bIns="0" rtlCol="0" anchor="ctr"/>
           <a:lstStyle/>
           <a:p>
-            <a:pPr indent="0" marL="0">
+            <a:pPr marL="0" indent="0">
               <a:buNone/>
             </a:pPr>
             <a:r>
@@ -2317,7 +2272,7 @@
           <a:bodyPr wrap="square" lIns="0" tIns="0" rIns="0" bIns="0" rtlCol="0" anchor="ctr"/>
           <a:lstStyle/>
           <a:p>
-            <a:pPr indent="0" marL="0">
+            <a:pPr marL="0" indent="0">
               <a:buNone/>
             </a:pPr>
             <a:r>
@@ -2361,6 +2316,13 @@
             <a:prstDash val="solid"/>
           </a:ln>
         </p:spPr>
+        <p:txBody>
+          <a:bodyPr/>
+          <a:lstStyle/>
+          <a:p>
+            <a:endParaRPr lang="en-US"/>
+          </a:p>
+        </p:txBody>
       </p:sp>
       <p:sp>
         <p:nvSpPr>
@@ -2388,6 +2350,13 @@
             <a:prstDash val="solid"/>
           </a:ln>
         </p:spPr>
+        <p:txBody>
+          <a:bodyPr/>
+          <a:lstStyle/>
+          <a:p>
+            <a:endParaRPr lang="en-US"/>
+          </a:p>
+        </p:txBody>
       </p:sp>
       <p:sp>
         <p:nvSpPr>
@@ -2413,6 +2382,13 @@
             <a:prstDash val="solid"/>
           </a:ln>
         </p:spPr>
+        <p:txBody>
+          <a:bodyPr/>
+          <a:lstStyle/>
+          <a:p>
+            <a:endParaRPr lang="en-US"/>
+          </a:p>
+        </p:txBody>
       </p:sp>
       <p:sp>
         <p:nvSpPr>
@@ -2435,7 +2411,7 @@
           <a:bodyPr wrap="square" lIns="0" tIns="0" rIns="0" bIns="0" rtlCol="0" anchor="ctr"/>
           <a:lstStyle/>
           <a:p>
-            <a:pPr indent="0" marL="0">
+            <a:pPr marL="0" indent="0">
               <a:buNone/>
             </a:pPr>
             <a:r>
@@ -2474,7 +2450,7 @@
           <a:bodyPr wrap="square" lIns="0" tIns="0" rIns="0" bIns="0" rtlCol="0" anchor="ctr"/>
           <a:lstStyle/>
           <a:p>
-            <a:pPr indent="0" marL="0">
+            <a:pPr marL="0" indent="0">
               <a:buNone/>
             </a:pPr>
             <a:r>
@@ -2518,6 +2494,13 @@
             <a:prstDash val="solid"/>
           </a:ln>
         </p:spPr>
+        <p:txBody>
+          <a:bodyPr/>
+          <a:lstStyle/>
+          <a:p>
+            <a:endParaRPr lang="en-US"/>
+          </a:p>
+        </p:txBody>
       </p:sp>
       <p:sp>
         <p:nvSpPr>
@@ -2545,6 +2528,13 @@
             <a:prstDash val="solid"/>
           </a:ln>
         </p:spPr>
+        <p:txBody>
+          <a:bodyPr/>
+          <a:lstStyle/>
+          <a:p>
+            <a:endParaRPr lang="en-US"/>
+          </a:p>
+        </p:txBody>
       </p:sp>
       <p:sp>
         <p:nvSpPr>
@@ -2572,6 +2562,13 @@
             <a:prstDash val="solid"/>
           </a:ln>
         </p:spPr>
+        <p:txBody>
+          <a:bodyPr/>
+          <a:lstStyle/>
+          <a:p>
+            <a:endParaRPr lang="en-US"/>
+          </a:p>
+        </p:txBody>
       </p:sp>
       <p:sp>
         <p:nvSpPr>
@@ -2594,7 +2591,7 @@
           <a:bodyPr wrap="square" lIns="0" tIns="0" rIns="0" bIns="0" rtlCol="0" anchor="ctr"/>
           <a:lstStyle/>
           <a:p>
-            <a:pPr indent="0" marL="0">
+            <a:pPr marL="0" indent="0">
               <a:buNone/>
             </a:pPr>
             <a:r>
@@ -2633,7 +2630,7 @@
           <a:bodyPr wrap="square" lIns="0" tIns="0" rIns="0" bIns="0" rtlCol="0" anchor="ctr"/>
           <a:lstStyle/>
           <a:p>
-            <a:pPr indent="0" marL="0">
+            <a:pPr marL="0" indent="0">
               <a:buNone/>
             </a:pPr>
             <a:r>
@@ -2677,6 +2674,13 @@
             <a:prstDash val="solid"/>
           </a:ln>
         </p:spPr>
+        <p:txBody>
+          <a:bodyPr/>
+          <a:lstStyle/>
+          <a:p>
+            <a:endParaRPr lang="en-US"/>
+          </a:p>
+        </p:txBody>
       </p:sp>
       <p:sp>
         <p:nvSpPr>
@@ -2704,6 +2708,13 @@
             <a:prstDash val="solid"/>
           </a:ln>
         </p:spPr>
+        <p:txBody>
+          <a:bodyPr/>
+          <a:lstStyle/>
+          <a:p>
+            <a:endParaRPr lang="en-US"/>
+          </a:p>
+        </p:txBody>
       </p:sp>
       <p:sp>
         <p:nvSpPr>
@@ -2729,6 +2740,13 @@
             <a:prstDash val="solid"/>
           </a:ln>
         </p:spPr>
+        <p:txBody>
+          <a:bodyPr/>
+          <a:lstStyle/>
+          <a:p>
+            <a:endParaRPr lang="en-US"/>
+          </a:p>
+        </p:txBody>
       </p:sp>
       <p:sp>
         <p:nvSpPr>
@@ -2751,7 +2769,7 @@
           <a:bodyPr wrap="square" lIns="0" tIns="0" rIns="0" bIns="0" rtlCol="0" anchor="ctr"/>
           <a:lstStyle/>
           <a:p>
-            <a:pPr indent="0" marL="0">
+            <a:pPr marL="0" indent="0">
               <a:buNone/>
             </a:pPr>
             <a:r>
@@ -2790,7 +2808,7 @@
           <a:bodyPr wrap="square" lIns="0" tIns="0" rIns="0" bIns="0" rtlCol="0" anchor="ctr"/>
           <a:lstStyle/>
           <a:p>
-            <a:pPr indent="0" marL="0">
+            <a:pPr marL="0" indent="0">
               <a:buNone/>
             </a:pPr>
             <a:r>
@@ -2834,6 +2852,13 @@
             <a:prstDash val="solid"/>
           </a:ln>
         </p:spPr>
+        <p:txBody>
+          <a:bodyPr/>
+          <a:lstStyle/>
+          <a:p>
+            <a:endParaRPr lang="en-US"/>
+          </a:p>
+        </p:txBody>
       </p:sp>
       <p:sp>
         <p:nvSpPr>
@@ -2861,6 +2886,13 @@
             <a:prstDash val="solid"/>
           </a:ln>
         </p:spPr>
+        <p:txBody>
+          <a:bodyPr/>
+          <a:lstStyle/>
+          <a:p>
+            <a:endParaRPr lang="en-US"/>
+          </a:p>
+        </p:txBody>
       </p:sp>
       <p:sp>
         <p:nvSpPr>
@@ -2886,6 +2918,13 @@
             <a:prstDash val="solid"/>
           </a:ln>
         </p:spPr>
+        <p:txBody>
+          <a:bodyPr/>
+          <a:lstStyle/>
+          <a:p>
+            <a:endParaRPr lang="en-US"/>
+          </a:p>
+        </p:txBody>
       </p:sp>
       <p:sp>
         <p:nvSpPr>
@@ -2908,7 +2947,7 @@
           <a:bodyPr wrap="square" lIns="0" tIns="0" rIns="0" bIns="0" rtlCol="0" anchor="ctr"/>
           <a:lstStyle/>
           <a:p>
-            <a:pPr indent="0" marL="0">
+            <a:pPr marL="0" indent="0">
               <a:buNone/>
             </a:pPr>
             <a:r>
@@ -2947,7 +2986,7 @@
           <a:bodyPr wrap="square" lIns="0" tIns="0" rIns="0" bIns="0" rtlCol="0" anchor="ctr"/>
           <a:lstStyle/>
           <a:p>
-            <a:pPr indent="0" marL="0">
+            <a:pPr marL="0" indent="0">
               <a:buNone/>
             </a:pPr>
             <a:r>
@@ -2967,7 +3006,7 @@
       </p:sp>
       <p:sp>
         <p:nvSpPr>
-          <p:cNvPr id="25" name="Slide Number Placeholder 0"/>
+          <p:cNvPr id="34" name="Slide Number Placeholder 0"/>
           <p:cNvSpPr>
             <a:spLocks noGrp="1"/>
           </p:cNvSpPr>
@@ -2985,7 +3024,7 @@
           </a:prstGeom>
           <a:extLst>
             <a:ext uri="{C572A759-6A51-4108-AA02-DFA0A04FC94B}">
-              <ma14:wrappingTextBoxFlag xmlns:ma14="http://schemas.microsoft.com/office/mac/drawingml/2011/main" val="0"/>
+              <ma14:wrappingTextBoxFlag xmlns:ma14="http://schemas.microsoft.com/office/mac/drawingml/2011/main" xmlns="" val="0"/>
             </a:ext>
           </a:extLst>
         </p:spPr>
@@ -3003,7 +3042,7 @@
           <a:p>
             <a:pPr algn="l"/>
             <a:fld id="{F7021451-1387-4CA6-816F-3879F97B5CBC}" type="slidenum">
-              <a:rPr b="0" lang="en-US"/>
+              <a:rPr lang="en-US" b="0"/>
               <a:t>2</a:t>
             </a:fld>
             <a:endParaRPr lang="en-US"/>
@@ -3019,6 +3058,1239 @@
 </file>
 
 <file path=ppt/slides/slide3.xml><?xml version="1.0" encoding="utf-8"?>
+<p:sld xmlns:a="http://schemas.openxmlformats.org/drawingml/2006/main" xmlns:r="http://schemas.openxmlformats.org/officeDocument/2006/relationships" xmlns:p="http://schemas.openxmlformats.org/presentationml/2006/main">
+  <p:cSld>
+    <p:spTree>
+      <p:nvGrpSpPr>
+        <p:cNvPr id="1" name="">
+          <a:extLst>
+            <a:ext uri="{FF2B5EF4-FFF2-40B4-BE49-F238E27FC236}">
+              <a16:creationId xmlns:a16="http://schemas.microsoft.com/office/drawing/2014/main" id="{51C38928-7243-CF4D-D7C2-2F3C1ABE9266}"/>
+            </a:ext>
+          </a:extLst>
+        </p:cNvPr>
+        <p:cNvGrpSpPr/>
+        <p:nvPr/>
+      </p:nvGrpSpPr>
+      <p:grpSpPr>
+        <a:xfrm>
+          <a:off x="0" y="0"/>
+          <a:ext cx="0" cy="0"/>
+          <a:chOff x="0" y="0"/>
+          <a:chExt cx="0" cy="0"/>
+        </a:xfrm>
+      </p:grpSpPr>
+      <p:sp>
+        <p:nvSpPr>
+          <p:cNvPr id="2" name="Text 0">
+            <a:extLst>
+              <a:ext uri="{FF2B5EF4-FFF2-40B4-BE49-F238E27FC236}">
+                <a16:creationId xmlns:a16="http://schemas.microsoft.com/office/drawing/2014/main" id="{2AD66DDE-1261-FFF4-437F-70FF37E1A740}"/>
+              </a:ext>
+            </a:extLst>
+          </p:cNvPr>
+          <p:cNvSpPr>
+            <a:spLocks noGrp="1"/>
+          </p:cNvSpPr>
+          <p:nvPr>
+            <p:ph type="title" idx="100" hasCustomPrompt="1"/>
+          </p:nvPr>
+        </p:nvSpPr>
+        <p:spPr>
+          <a:xfrm>
+            <a:off x="457200" y="274320"/>
+            <a:ext cx="8229600" cy="777240"/>
+          </a:xfrm>
+          <a:prstGeom prst="rect">
+            <a:avLst/>
+          </a:prstGeom>
+          <a:noFill/>
+          <a:ln/>
+        </p:spPr>
+        <p:txBody>
+          <a:bodyPr wrap="square" lIns="0" tIns="0" rIns="0" bIns="0" rtlCol="0" anchor="ctr"/>
+          <a:lstStyle/>
+          <a:p>
+            <a:pPr marL="0" indent="0" algn="l">
+              <a:buNone/>
+            </a:pPr>
+            <a:r>
+              <a:rPr lang="en-US" sz="3400" b="1" dirty="0">
+                <a:solidFill>
+                  <a:schemeClr val="tx1"/>
+                </a:solidFill>
+              </a:rPr>
+              <a:t>Content Summary</a:t>
+            </a:r>
+            <a:endParaRPr lang="en-US" sz="3400" dirty="0"/>
+          </a:p>
+        </p:txBody>
+      </p:sp>
+      <p:sp>
+        <p:nvSpPr>
+          <p:cNvPr id="3" name="Text 1">
+            <a:extLst>
+              <a:ext uri="{FF2B5EF4-FFF2-40B4-BE49-F238E27FC236}">
+                <a16:creationId xmlns:a16="http://schemas.microsoft.com/office/drawing/2014/main" id="{46EFCC42-3184-91E2-561F-22787CEC5581}"/>
+              </a:ext>
+            </a:extLst>
+          </p:cNvPr>
+          <p:cNvSpPr txBox="1"/>
+          <p:nvPr/>
+        </p:nvSpPr>
+        <p:spPr>
+          <a:xfrm>
+            <a:off x="457200" y="914400"/>
+            <a:ext cx="8229600" cy="274320"/>
+          </a:xfrm>
+          <a:prstGeom prst="rect">
+            <a:avLst/>
+          </a:prstGeom>
+          <a:noFill/>
+          <a:ln/>
+        </p:spPr>
+        <p:txBody>
+          <a:bodyPr wrap="square" lIns="0" tIns="0" rIns="0" bIns="0" rtlCol="0" anchor="ctr"/>
+          <a:lstStyle/>
+          <a:p>
+            <a:pPr marL="0" indent="0">
+              <a:buNone/>
+            </a:pPr>
+            <a:r>
+              <a:rPr lang="en-US" sz="1600" b="1" dirty="0">
+                <a:solidFill>
+                  <a:schemeClr val="accent2"/>
+                </a:solidFill>
+                <a:latin typeface="Calibri" pitchFamily="34" charset="0"/>
+                <a:ea typeface="Calibri" pitchFamily="34" charset="-122"/>
+                <a:cs typeface="Calibri" pitchFamily="34" charset="-120"/>
+              </a:rPr>
+              <a:t>Our full OER package, hosted on GitHub</a:t>
+            </a:r>
+            <a:endParaRPr lang="en-US" sz="1600" dirty="0"/>
+          </a:p>
+        </p:txBody>
+      </p:sp>
+      <p:sp>
+        <p:nvSpPr>
+          <p:cNvPr id="4" name="Summary card 1 shadow"/>
+          <p:cNvSpPr/>
+          <p:nvPr/>
+        </p:nvSpPr>
+        <p:spPr>
+          <a:xfrm>
+            <a:off x="521208" y="1325880"/>
+            <a:ext cx="5760720" cy="521208"/>
+          </a:xfrm>
+          <a:prstGeom prst="roundRect">
+            <a:avLst>
+              <a:gd name="adj" fmla="val 21053"/>
+            </a:avLst>
+          </a:prstGeom>
+          <a:solidFill>
+            <a:schemeClr val="accent4"/>
+          </a:solidFill>
+          <a:ln w="3175">
+            <a:solidFill>
+              <a:schemeClr val="accent4"/>
+            </a:solidFill>
+            <a:prstDash val="solid"/>
+          </a:ln>
+        </p:spPr>
+        <p:txBody>
+          <a:bodyPr/>
+          <a:lstStyle/>
+          <a:p>
+            <a:endParaRPr lang="en-US"/>
+          </a:p>
+        </p:txBody>
+      </p:sp>
+      <p:sp>
+        <p:nvSpPr>
+          <p:cNvPr id="5" name="Summary card 1"/>
+          <p:cNvSpPr/>
+          <p:nvPr/>
+        </p:nvSpPr>
+        <p:spPr>
+          <a:xfrm>
+            <a:off x="457200" y="1261872"/>
+            <a:ext cx="5760720" cy="521208"/>
+          </a:xfrm>
+          <a:prstGeom prst="roundRect">
+            <a:avLst>
+              <a:gd name="adj" fmla="val 21053"/>
+            </a:avLst>
+          </a:prstGeom>
+          <a:solidFill>
+            <a:schemeClr val="bg2"/>
+          </a:solidFill>
+          <a:ln w="19050">
+            <a:solidFill>
+              <a:schemeClr val="tx1"/>
+            </a:solidFill>
+            <a:prstDash val="solid"/>
+          </a:ln>
+        </p:spPr>
+        <p:txBody>
+          <a:bodyPr/>
+          <a:lstStyle/>
+          <a:p>
+            <a:endParaRPr lang="en-US"/>
+          </a:p>
+        </p:txBody>
+      </p:sp>
+      <p:sp>
+        <p:nvSpPr>
+          <p:cNvPr id="6" name="Summary icon 1"/>
+          <p:cNvSpPr/>
+          <p:nvPr/>
+        </p:nvSpPr>
+        <p:spPr>
+          <a:xfrm>
+            <a:off x="594360" y="1394460"/>
+            <a:ext cx="347472" cy="256032"/>
+          </a:xfrm>
+          <a:prstGeom prst="roundRect">
+            <a:avLst>
+              <a:gd name="adj" fmla="val 50000"/>
+            </a:avLst>
+          </a:prstGeom>
+          <a:solidFill>
+            <a:schemeClr val="accent3"/>
+          </a:solidFill>
+          <a:ln w="19050">
+            <a:solidFill>
+              <a:schemeClr val="tx1"/>
+            </a:solidFill>
+            <a:prstDash val="solid"/>
+          </a:ln>
+        </p:spPr>
+        <p:txBody>
+          <a:bodyPr/>
+          <a:lstStyle/>
+          <a:p>
+            <a:endParaRPr lang="en-US"/>
+          </a:p>
+        </p:txBody>
+      </p:sp>
+      <p:sp>
+        <p:nvSpPr>
+          <p:cNvPr id="7" name="Text 5"/>
+          <p:cNvSpPr txBox="1"/>
+          <p:nvPr/>
+        </p:nvSpPr>
+        <p:spPr>
+          <a:xfrm>
+            <a:off x="1097280" y="1261872"/>
+            <a:ext cx="1463040" cy="521208"/>
+          </a:xfrm>
+          <a:prstGeom prst="rect">
+            <a:avLst/>
+          </a:prstGeom>
+          <a:noFill/>
+          <a:ln/>
+        </p:spPr>
+        <p:txBody>
+          <a:bodyPr wrap="square" lIns="0" tIns="0" rIns="0" bIns="0" rtlCol="0" anchor="ctr"/>
+          <a:lstStyle/>
+          <a:p>
+            <a:pPr marL="0" indent="0">
+              <a:buNone/>
+            </a:pPr>
+            <a:r>
+              <a:rPr lang="en-US" sz="1300" b="1" dirty="0">
+                <a:solidFill>
+                  <a:schemeClr val="accent2"/>
+                </a:solidFill>
+                <a:latin typeface="Calibri" pitchFamily="34" charset="0"/>
+                <a:ea typeface="Calibri" pitchFamily="34" charset="-122"/>
+                <a:cs typeface="Calibri" pitchFamily="34" charset="-120"/>
+              </a:rPr>
+              <a:t>Learner material</a:t>
+            </a:r>
+            <a:endParaRPr lang="en-US" sz="1200" dirty="0"/>
+          </a:p>
+        </p:txBody>
+      </p:sp>
+      <p:sp>
+        <p:nvSpPr>
+          <p:cNvPr id="8" name="Text 6"/>
+          <p:cNvSpPr txBox="1"/>
+          <p:nvPr/>
+        </p:nvSpPr>
+        <p:spPr>
+          <a:xfrm>
+            <a:off x="2606040" y="1261872"/>
+            <a:ext cx="3520440" cy="521208"/>
+          </a:xfrm>
+          <a:prstGeom prst="rect">
+            <a:avLst/>
+          </a:prstGeom>
+          <a:noFill/>
+          <a:ln/>
+        </p:spPr>
+        <p:txBody>
+          <a:bodyPr wrap="square" lIns="0" tIns="0" rIns="0" bIns="0" rtlCol="0" anchor="ctr"/>
+          <a:lstStyle/>
+          <a:p>
+            <a:pPr marL="0" indent="0">
+              <a:buNone/>
+            </a:pPr>
+            <a:r>
+              <a:rPr lang="en-US" sz="1200" dirty="0">
+                <a:solidFill>
+                  <a:schemeClr val="tx1"/>
+                </a:solidFill>
+                <a:latin typeface="Calibri" pitchFamily="34" charset="0"/>
+                <a:ea typeface="Calibri" pitchFamily="34" charset="-122"/>
+                <a:cs typeface="Calibri" pitchFamily="34" charset="-120"/>
+              </a:rPr>
+              <a:t>Learner guide, flowchart worksheet and exit ticket.</a:t>
+            </a:r>
+            <a:endParaRPr lang="en-US" sz="1200" dirty="0"/>
+          </a:p>
+        </p:txBody>
+      </p:sp>
+      <p:sp>
+        <p:nvSpPr>
+          <p:cNvPr id="9" name="Summary card 2 shadow"/>
+          <p:cNvSpPr/>
+          <p:nvPr/>
+        </p:nvSpPr>
+        <p:spPr>
+          <a:xfrm>
+            <a:off x="521208" y="1901952"/>
+            <a:ext cx="5760720" cy="521208"/>
+          </a:xfrm>
+          <a:prstGeom prst="roundRect">
+            <a:avLst>
+              <a:gd name="adj" fmla="val 21053"/>
+            </a:avLst>
+          </a:prstGeom>
+          <a:solidFill>
+            <a:schemeClr val="accent4"/>
+          </a:solidFill>
+          <a:ln w="3175">
+            <a:solidFill>
+              <a:schemeClr val="accent4"/>
+            </a:solidFill>
+            <a:prstDash val="solid"/>
+          </a:ln>
+        </p:spPr>
+        <p:txBody>
+          <a:bodyPr/>
+          <a:lstStyle/>
+          <a:p>
+            <a:endParaRPr lang="en-US"/>
+          </a:p>
+        </p:txBody>
+      </p:sp>
+      <p:sp>
+        <p:nvSpPr>
+          <p:cNvPr id="10" name="Summary card 2"/>
+          <p:cNvSpPr/>
+          <p:nvPr/>
+        </p:nvSpPr>
+        <p:spPr>
+          <a:xfrm>
+            <a:off x="457200" y="1837944"/>
+            <a:ext cx="5760720" cy="521208"/>
+          </a:xfrm>
+          <a:prstGeom prst="roundRect">
+            <a:avLst>
+              <a:gd name="adj" fmla="val 21053"/>
+            </a:avLst>
+          </a:prstGeom>
+          <a:solidFill>
+            <a:schemeClr val="bg2"/>
+          </a:solidFill>
+          <a:ln w="19050">
+            <a:solidFill>
+              <a:schemeClr val="tx1"/>
+            </a:solidFill>
+            <a:prstDash val="solid"/>
+          </a:ln>
+        </p:spPr>
+        <p:txBody>
+          <a:bodyPr/>
+          <a:lstStyle/>
+          <a:p>
+            <a:endParaRPr lang="en-US"/>
+          </a:p>
+        </p:txBody>
+      </p:sp>
+      <p:sp>
+        <p:nvSpPr>
+          <p:cNvPr id="11" name="Summary icon 2"/>
+          <p:cNvSpPr/>
+          <p:nvPr/>
+        </p:nvSpPr>
+        <p:spPr>
+          <a:xfrm>
+            <a:off x="594360" y="1970532"/>
+            <a:ext cx="347472" cy="256032"/>
+          </a:xfrm>
+          <a:prstGeom prst="rect">
+            <a:avLst/>
+          </a:prstGeom>
+          <a:solidFill>
+            <a:schemeClr val="accent3"/>
+          </a:solidFill>
+          <a:ln w="19050">
+            <a:solidFill>
+              <a:schemeClr val="tx1"/>
+            </a:solidFill>
+            <a:prstDash val="solid"/>
+          </a:ln>
+        </p:spPr>
+        <p:txBody>
+          <a:bodyPr/>
+          <a:lstStyle/>
+          <a:p>
+            <a:endParaRPr lang="en-US"/>
+          </a:p>
+        </p:txBody>
+      </p:sp>
+      <p:sp>
+        <p:nvSpPr>
+          <p:cNvPr id="12" name="Text 10"/>
+          <p:cNvSpPr txBox="1"/>
+          <p:nvPr/>
+        </p:nvSpPr>
+        <p:spPr>
+          <a:xfrm>
+            <a:off x="1097280" y="1837944"/>
+            <a:ext cx="1463040" cy="521208"/>
+          </a:xfrm>
+          <a:prstGeom prst="rect">
+            <a:avLst/>
+          </a:prstGeom>
+          <a:noFill/>
+          <a:ln/>
+        </p:spPr>
+        <p:txBody>
+          <a:bodyPr wrap="square" lIns="0" tIns="0" rIns="0" bIns="0" rtlCol="0" anchor="ctr"/>
+          <a:lstStyle/>
+          <a:p>
+            <a:pPr marL="0" indent="0">
+              <a:buNone/>
+            </a:pPr>
+            <a:r>
+              <a:rPr lang="en-US" sz="1300" b="1" dirty="0">
+                <a:solidFill>
+                  <a:schemeClr val="accent2"/>
+                </a:solidFill>
+                <a:latin typeface="Calibri" pitchFamily="34" charset="0"/>
+                <a:ea typeface="Calibri" pitchFamily="34" charset="-122"/>
+                <a:cs typeface="Calibri" pitchFamily="34" charset="-120"/>
+              </a:rPr>
+              <a:t>Teacher guide</a:t>
+            </a:r>
+            <a:endParaRPr lang="en-US" sz="1200" dirty="0"/>
+          </a:p>
+        </p:txBody>
+      </p:sp>
+      <p:sp>
+        <p:nvSpPr>
+          <p:cNvPr id="13" name="Text 11"/>
+          <p:cNvSpPr txBox="1"/>
+          <p:nvPr/>
+        </p:nvSpPr>
+        <p:spPr>
+          <a:xfrm>
+            <a:off x="2606040" y="1837944"/>
+            <a:ext cx="3520440" cy="521208"/>
+          </a:xfrm>
+          <a:prstGeom prst="rect">
+            <a:avLst/>
+          </a:prstGeom>
+          <a:noFill/>
+          <a:ln/>
+        </p:spPr>
+        <p:txBody>
+          <a:bodyPr wrap="square" lIns="0" tIns="0" rIns="0" bIns="0" rtlCol="0" anchor="ctr"/>
+          <a:lstStyle/>
+          <a:p>
+            <a:pPr marL="0" indent="0">
+              <a:buNone/>
+            </a:pPr>
+            <a:r>
+              <a:rPr lang="en-US" sz="1200" dirty="0">
+                <a:solidFill>
+                  <a:schemeClr val="tx1"/>
+                </a:solidFill>
+                <a:latin typeface="Calibri" pitchFamily="34" charset="0"/>
+                <a:ea typeface="Calibri" pitchFamily="34" charset="-122"/>
+                <a:cs typeface="Calibri" pitchFamily="34" charset="-120"/>
+              </a:rPr>
+              <a:t>Guide for Lessons 1-5 plus five CAPS lesson plans.</a:t>
+            </a:r>
+            <a:endParaRPr lang="en-US" sz="1200" dirty="0"/>
+          </a:p>
+        </p:txBody>
+      </p:sp>
+      <p:sp>
+        <p:nvSpPr>
+          <p:cNvPr id="14" name="Summary card 3 shadow"/>
+          <p:cNvSpPr/>
+          <p:nvPr/>
+        </p:nvSpPr>
+        <p:spPr>
+          <a:xfrm>
+            <a:off x="521208" y="2478024"/>
+            <a:ext cx="5760720" cy="521208"/>
+          </a:xfrm>
+          <a:prstGeom prst="roundRect">
+            <a:avLst>
+              <a:gd name="adj" fmla="val 21053"/>
+            </a:avLst>
+          </a:prstGeom>
+          <a:solidFill>
+            <a:schemeClr val="accent4"/>
+          </a:solidFill>
+          <a:ln w="3175">
+            <a:solidFill>
+              <a:schemeClr val="accent4"/>
+            </a:solidFill>
+            <a:prstDash val="solid"/>
+          </a:ln>
+        </p:spPr>
+        <p:txBody>
+          <a:bodyPr/>
+          <a:lstStyle/>
+          <a:p>
+            <a:endParaRPr lang="en-US"/>
+          </a:p>
+        </p:txBody>
+      </p:sp>
+      <p:sp>
+        <p:nvSpPr>
+          <p:cNvPr id="15" name="Summary card 3"/>
+          <p:cNvSpPr/>
+          <p:nvPr/>
+        </p:nvSpPr>
+        <p:spPr>
+          <a:xfrm>
+            <a:off x="457200" y="2414016"/>
+            <a:ext cx="5760720" cy="521208"/>
+          </a:xfrm>
+          <a:prstGeom prst="roundRect">
+            <a:avLst>
+              <a:gd name="adj" fmla="val 21053"/>
+            </a:avLst>
+          </a:prstGeom>
+          <a:solidFill>
+            <a:schemeClr val="bg2"/>
+          </a:solidFill>
+          <a:ln w="19050">
+            <a:solidFill>
+              <a:schemeClr val="tx1"/>
+            </a:solidFill>
+            <a:prstDash val="solid"/>
+          </a:ln>
+        </p:spPr>
+        <p:txBody>
+          <a:bodyPr/>
+          <a:lstStyle/>
+          <a:p>
+            <a:endParaRPr lang="en-US"/>
+          </a:p>
+        </p:txBody>
+      </p:sp>
+      <p:sp>
+        <p:nvSpPr>
+          <p:cNvPr id="16" name="Summary icon 3"/>
+          <p:cNvSpPr/>
+          <p:nvPr/>
+        </p:nvSpPr>
+        <p:spPr>
+          <a:xfrm>
+            <a:off x="594360" y="2546604"/>
+            <a:ext cx="347472" cy="256032"/>
+          </a:xfrm>
+          <a:prstGeom prst="diamond">
+            <a:avLst/>
+          </a:prstGeom>
+          <a:solidFill>
+            <a:schemeClr val="accent3"/>
+          </a:solidFill>
+          <a:ln w="19050">
+            <a:solidFill>
+              <a:schemeClr val="tx1"/>
+            </a:solidFill>
+            <a:prstDash val="solid"/>
+          </a:ln>
+        </p:spPr>
+        <p:txBody>
+          <a:bodyPr/>
+          <a:lstStyle/>
+          <a:p>
+            <a:endParaRPr lang="en-US"/>
+          </a:p>
+        </p:txBody>
+      </p:sp>
+      <p:sp>
+        <p:nvSpPr>
+          <p:cNvPr id="17" name="Text 15"/>
+          <p:cNvSpPr txBox="1"/>
+          <p:nvPr/>
+        </p:nvSpPr>
+        <p:spPr>
+          <a:xfrm>
+            <a:off x="1097280" y="2414016"/>
+            <a:ext cx="1463040" cy="521208"/>
+          </a:xfrm>
+          <a:prstGeom prst="rect">
+            <a:avLst/>
+          </a:prstGeom>
+          <a:noFill/>
+          <a:ln/>
+        </p:spPr>
+        <p:txBody>
+          <a:bodyPr wrap="square" lIns="0" tIns="0" rIns="0" bIns="0" rtlCol="0" anchor="ctr"/>
+          <a:lstStyle/>
+          <a:p>
+            <a:pPr marL="0" indent="0">
+              <a:buNone/>
+            </a:pPr>
+            <a:r>
+              <a:rPr lang="en-US" sz="1300" b="1" dirty="0">
+                <a:solidFill>
+                  <a:schemeClr val="accent2"/>
+                </a:solidFill>
+                <a:latin typeface="Calibri" pitchFamily="34" charset="0"/>
+                <a:ea typeface="Calibri" pitchFamily="34" charset="-122"/>
+                <a:cs typeface="Calibri" pitchFamily="34" charset="-120"/>
+              </a:rPr>
+              <a:t>Assessment</a:t>
+            </a:r>
+            <a:endParaRPr lang="en-US" sz="1200" dirty="0"/>
+          </a:p>
+        </p:txBody>
+      </p:sp>
+      <p:sp>
+        <p:nvSpPr>
+          <p:cNvPr id="18" name="Text 16"/>
+          <p:cNvSpPr txBox="1"/>
+          <p:nvPr/>
+        </p:nvSpPr>
+        <p:spPr>
+          <a:xfrm>
+            <a:off x="2606040" y="2414016"/>
+            <a:ext cx="3520440" cy="521208"/>
+          </a:xfrm>
+          <a:prstGeom prst="rect">
+            <a:avLst/>
+          </a:prstGeom>
+          <a:noFill/>
+          <a:ln/>
+        </p:spPr>
+        <p:txBody>
+          <a:bodyPr wrap="square" lIns="0" tIns="0" rIns="0" bIns="0" rtlCol="0" anchor="ctr"/>
+          <a:lstStyle/>
+          <a:p>
+            <a:pPr marL="0" indent="0">
+              <a:buNone/>
+            </a:pPr>
+            <a:r>
+              <a:rPr lang="en-US" sz="1200" dirty="0">
+                <a:solidFill>
+                  <a:schemeClr val="tx1"/>
+                </a:solidFill>
+                <a:latin typeface="Calibri" pitchFamily="34" charset="0"/>
+                <a:ea typeface="Calibri" pitchFamily="34" charset="-122"/>
+                <a:cs typeface="Calibri" pitchFamily="34" charset="-120"/>
+              </a:rPr>
+              <a:t>Formative and summative papers, each with a memo.</a:t>
+            </a:r>
+            <a:endParaRPr lang="en-US" sz="1200" dirty="0"/>
+          </a:p>
+        </p:txBody>
+      </p:sp>
+      <p:sp>
+        <p:nvSpPr>
+          <p:cNvPr id="19" name="Summary card 4 shadow"/>
+          <p:cNvSpPr/>
+          <p:nvPr/>
+        </p:nvSpPr>
+        <p:spPr>
+          <a:xfrm>
+            <a:off x="521208" y="3054096"/>
+            <a:ext cx="5760720" cy="521208"/>
+          </a:xfrm>
+          <a:prstGeom prst="roundRect">
+            <a:avLst>
+              <a:gd name="adj" fmla="val 21053"/>
+            </a:avLst>
+          </a:prstGeom>
+          <a:solidFill>
+            <a:schemeClr val="accent4"/>
+          </a:solidFill>
+          <a:ln w="3175">
+            <a:solidFill>
+              <a:schemeClr val="accent4"/>
+            </a:solidFill>
+            <a:prstDash val="solid"/>
+          </a:ln>
+        </p:spPr>
+        <p:txBody>
+          <a:bodyPr/>
+          <a:lstStyle/>
+          <a:p>
+            <a:endParaRPr lang="en-US"/>
+          </a:p>
+        </p:txBody>
+      </p:sp>
+      <p:sp>
+        <p:nvSpPr>
+          <p:cNvPr id="20" name="Summary card 4"/>
+          <p:cNvSpPr/>
+          <p:nvPr/>
+        </p:nvSpPr>
+        <p:spPr>
+          <a:xfrm>
+            <a:off x="457200" y="2990088"/>
+            <a:ext cx="5760720" cy="521208"/>
+          </a:xfrm>
+          <a:prstGeom prst="roundRect">
+            <a:avLst>
+              <a:gd name="adj" fmla="val 21053"/>
+            </a:avLst>
+          </a:prstGeom>
+          <a:solidFill>
+            <a:schemeClr val="bg2"/>
+          </a:solidFill>
+          <a:ln w="19050">
+            <a:solidFill>
+              <a:schemeClr val="tx1"/>
+            </a:solidFill>
+            <a:prstDash val="solid"/>
+          </a:ln>
+        </p:spPr>
+        <p:txBody>
+          <a:bodyPr/>
+          <a:lstStyle/>
+          <a:p>
+            <a:endParaRPr lang="en-US"/>
+          </a:p>
+        </p:txBody>
+      </p:sp>
+      <p:sp>
+        <p:nvSpPr>
+          <p:cNvPr id="21" name="Summary icon 4"/>
+          <p:cNvSpPr/>
+          <p:nvPr/>
+        </p:nvSpPr>
+        <p:spPr>
+          <a:xfrm>
+            <a:off x="594360" y="3122676"/>
+            <a:ext cx="347472" cy="256032"/>
+          </a:xfrm>
+          <a:prstGeom prst="roundRect">
+            <a:avLst>
+              <a:gd name="adj" fmla="val 50000"/>
+            </a:avLst>
+          </a:prstGeom>
+          <a:solidFill>
+            <a:schemeClr val="accent3"/>
+          </a:solidFill>
+          <a:ln w="19050">
+            <a:solidFill>
+              <a:schemeClr val="tx1"/>
+            </a:solidFill>
+            <a:prstDash val="solid"/>
+          </a:ln>
+        </p:spPr>
+        <p:txBody>
+          <a:bodyPr/>
+          <a:lstStyle/>
+          <a:p>
+            <a:endParaRPr lang="en-US"/>
+          </a:p>
+        </p:txBody>
+      </p:sp>
+      <p:sp>
+        <p:nvSpPr>
+          <p:cNvPr id="22" name="Text 20"/>
+          <p:cNvSpPr txBox="1"/>
+          <p:nvPr/>
+        </p:nvSpPr>
+        <p:spPr>
+          <a:xfrm>
+            <a:off x="1097280" y="2990088"/>
+            <a:ext cx="1463040" cy="521208"/>
+          </a:xfrm>
+          <a:prstGeom prst="rect">
+            <a:avLst/>
+          </a:prstGeom>
+          <a:noFill/>
+          <a:ln/>
+        </p:spPr>
+        <p:txBody>
+          <a:bodyPr wrap="square" lIns="0" tIns="0" rIns="0" bIns="0" rtlCol="0" anchor="ctr"/>
+          <a:lstStyle/>
+          <a:p>
+            <a:pPr marL="0" indent="0">
+              <a:buNone/>
+            </a:pPr>
+            <a:r>
+              <a:rPr lang="en-US" sz="1300" b="1" dirty="0">
+                <a:solidFill>
+                  <a:schemeClr val="accent2"/>
+                </a:solidFill>
+                <a:latin typeface="Calibri" pitchFamily="34" charset="0"/>
+                <a:ea typeface="Calibri" pitchFamily="34" charset="-122"/>
+                <a:cs typeface="Calibri" pitchFamily="34" charset="-120"/>
+              </a:rPr>
+              <a:t>Digital game</a:t>
+            </a:r>
+            <a:endParaRPr lang="en-US" sz="1200" dirty="0"/>
+          </a:p>
+        </p:txBody>
+      </p:sp>
+      <p:sp>
+        <p:nvSpPr>
+          <p:cNvPr id="23" name="Text 21"/>
+          <p:cNvSpPr txBox="1"/>
+          <p:nvPr/>
+        </p:nvSpPr>
+        <p:spPr>
+          <a:xfrm>
+            <a:off x="2606040" y="2990088"/>
+            <a:ext cx="3520440" cy="521208"/>
+          </a:xfrm>
+          <a:prstGeom prst="rect">
+            <a:avLst/>
+          </a:prstGeom>
+          <a:noFill/>
+          <a:ln/>
+        </p:spPr>
+        <p:txBody>
+          <a:bodyPr wrap="square" lIns="0" tIns="0" rIns="0" bIns="0" rtlCol="0" anchor="ctr"/>
+          <a:lstStyle/>
+          <a:p>
+            <a:pPr marL="0" indent="0">
+              <a:buNone/>
+            </a:pPr>
+            <a:r>
+              <a:rPr lang="en-US" sz="1200" dirty="0">
+                <a:solidFill>
+                  <a:schemeClr val="tx1"/>
+                </a:solidFill>
+                <a:latin typeface="Calibri" pitchFamily="34" charset="0"/>
+                <a:ea typeface="Calibri" pitchFamily="34" charset="-122"/>
+                <a:cs typeface="Calibri" pitchFamily="34" charset="-120"/>
+              </a:rPr>
+              <a:t>Sipho’s Morning, an algorithm story that runs in a browser.</a:t>
+            </a:r>
+            <a:endParaRPr lang="en-US" sz="1200" dirty="0"/>
+          </a:p>
+        </p:txBody>
+      </p:sp>
+      <p:sp>
+        <p:nvSpPr>
+          <p:cNvPr id="24" name="Summary card 5 shadow"/>
+          <p:cNvSpPr/>
+          <p:nvPr/>
+        </p:nvSpPr>
+        <p:spPr>
+          <a:xfrm>
+            <a:off x="521208" y="3630168"/>
+            <a:ext cx="5760720" cy="521208"/>
+          </a:xfrm>
+          <a:prstGeom prst="roundRect">
+            <a:avLst>
+              <a:gd name="adj" fmla="val 21053"/>
+            </a:avLst>
+          </a:prstGeom>
+          <a:solidFill>
+            <a:schemeClr val="accent4"/>
+          </a:solidFill>
+          <a:ln w="3175">
+            <a:solidFill>
+              <a:schemeClr val="accent4"/>
+            </a:solidFill>
+            <a:prstDash val="solid"/>
+          </a:ln>
+        </p:spPr>
+        <p:txBody>
+          <a:bodyPr/>
+          <a:lstStyle/>
+          <a:p>
+            <a:endParaRPr lang="en-US"/>
+          </a:p>
+        </p:txBody>
+      </p:sp>
+      <p:sp>
+        <p:nvSpPr>
+          <p:cNvPr id="25" name="Summary card 5"/>
+          <p:cNvSpPr/>
+          <p:nvPr/>
+        </p:nvSpPr>
+        <p:spPr>
+          <a:xfrm>
+            <a:off x="457200" y="3566160"/>
+            <a:ext cx="5760720" cy="521208"/>
+          </a:xfrm>
+          <a:prstGeom prst="roundRect">
+            <a:avLst>
+              <a:gd name="adj" fmla="val 21053"/>
+            </a:avLst>
+          </a:prstGeom>
+          <a:solidFill>
+            <a:schemeClr val="bg2"/>
+          </a:solidFill>
+          <a:ln w="19050">
+            <a:solidFill>
+              <a:schemeClr val="tx1"/>
+            </a:solidFill>
+            <a:prstDash val="solid"/>
+          </a:ln>
+        </p:spPr>
+        <p:txBody>
+          <a:bodyPr/>
+          <a:lstStyle/>
+          <a:p>
+            <a:endParaRPr lang="en-US"/>
+          </a:p>
+        </p:txBody>
+      </p:sp>
+      <p:sp>
+        <p:nvSpPr>
+          <p:cNvPr id="26" name="Summary icon 5"/>
+          <p:cNvSpPr/>
+          <p:nvPr/>
+        </p:nvSpPr>
+        <p:spPr>
+          <a:xfrm>
+            <a:off x="594360" y="3698748"/>
+            <a:ext cx="347472" cy="256032"/>
+          </a:xfrm>
+          <a:prstGeom prst="rect">
+            <a:avLst/>
+          </a:prstGeom>
+          <a:solidFill>
+            <a:schemeClr val="accent3"/>
+          </a:solidFill>
+          <a:ln w="19050">
+            <a:solidFill>
+              <a:schemeClr val="tx1"/>
+            </a:solidFill>
+            <a:prstDash val="solid"/>
+          </a:ln>
+        </p:spPr>
+        <p:txBody>
+          <a:bodyPr/>
+          <a:lstStyle/>
+          <a:p>
+            <a:endParaRPr lang="en-US"/>
+          </a:p>
+        </p:txBody>
+      </p:sp>
+      <p:sp>
+        <p:nvSpPr>
+          <p:cNvPr id="27" name="Text 25"/>
+          <p:cNvSpPr txBox="1"/>
+          <p:nvPr/>
+        </p:nvSpPr>
+        <p:spPr>
+          <a:xfrm>
+            <a:off x="1097280" y="3566160"/>
+            <a:ext cx="1463040" cy="521208"/>
+          </a:xfrm>
+          <a:prstGeom prst="rect">
+            <a:avLst/>
+          </a:prstGeom>
+          <a:noFill/>
+          <a:ln/>
+        </p:spPr>
+        <p:txBody>
+          <a:bodyPr wrap="square" lIns="0" tIns="0" rIns="0" bIns="0" rtlCol="0" anchor="ctr"/>
+          <a:lstStyle/>
+          <a:p>
+            <a:pPr marL="0" indent="0">
+              <a:buNone/>
+            </a:pPr>
+            <a:r>
+              <a:rPr lang="en-US" sz="1300" b="1" dirty="0">
+                <a:solidFill>
+                  <a:schemeClr val="accent2"/>
+                </a:solidFill>
+                <a:latin typeface="Calibri" pitchFamily="34" charset="0"/>
+                <a:ea typeface="Calibri" pitchFamily="34" charset="-122"/>
+                <a:cs typeface="Calibri" pitchFamily="34" charset="-120"/>
+              </a:rPr>
+              <a:t>Open licence</a:t>
+            </a:r>
+            <a:endParaRPr lang="en-US" sz="1200" dirty="0"/>
+          </a:p>
+        </p:txBody>
+      </p:sp>
+      <p:sp>
+        <p:nvSpPr>
+          <p:cNvPr id="28" name="Text 26"/>
+          <p:cNvSpPr txBox="1"/>
+          <p:nvPr/>
+        </p:nvSpPr>
+        <p:spPr>
+          <a:xfrm>
+            <a:off x="2606040" y="3566160"/>
+            <a:ext cx="3520440" cy="521208"/>
+          </a:xfrm>
+          <a:prstGeom prst="rect">
+            <a:avLst/>
+          </a:prstGeom>
+          <a:noFill/>
+          <a:ln/>
+        </p:spPr>
+        <p:txBody>
+          <a:bodyPr wrap="square" lIns="0" tIns="0" rIns="0" bIns="0" rtlCol="0" anchor="ctr"/>
+          <a:lstStyle/>
+          <a:p>
+            <a:pPr marL="0" indent="0">
+              <a:buNone/>
+            </a:pPr>
+            <a:r>
+              <a:rPr lang="en-US" sz="1200" dirty="0">
+                <a:solidFill>
+                  <a:schemeClr val="tx1"/>
+                </a:solidFill>
+                <a:latin typeface="Calibri" pitchFamily="34" charset="0"/>
+                <a:ea typeface="Calibri" pitchFamily="34" charset="-122"/>
+                <a:cs typeface="Calibri" pitchFamily="34" charset="-120"/>
+              </a:rPr>
+              <a:t>CC BY-SA 4.0: free to use, adapt and share.</a:t>
+            </a:r>
+            <a:endParaRPr lang="en-US" sz="1200" dirty="0"/>
+          </a:p>
+        </p:txBody>
+      </p:sp>
+      <p:sp>
+        <p:nvSpPr>
+          <p:cNvPr id="40" name="QR card shadow"/>
+          <p:cNvSpPr/>
+          <p:nvPr/>
+        </p:nvSpPr>
+        <p:spPr>
+          <a:xfrm>
+            <a:off x="6464808" y="1325880"/>
+            <a:ext cx="2286000" cy="2825496"/>
+          </a:xfrm>
+          <a:prstGeom prst="roundRect">
+            <a:avLst>
+              <a:gd name="adj" fmla="val 9000"/>
+            </a:avLst>
+          </a:prstGeom>
+          <a:solidFill>
+            <a:schemeClr val="accent4"/>
+          </a:solidFill>
+          <a:ln w="3175">
+            <a:solidFill>
+              <a:schemeClr val="accent4"/>
+            </a:solidFill>
+            <a:prstDash val="solid"/>
+          </a:ln>
+        </p:spPr>
+        <p:txBody>
+          <a:bodyPr/>
+          <a:lstStyle/>
+          <a:p>
+            <a:endParaRPr lang="en-US"/>
+          </a:p>
+        </p:txBody>
+      </p:sp>
+      <p:sp>
+        <p:nvSpPr>
+          <p:cNvPr id="41" name="QR card"/>
+          <p:cNvSpPr/>
+          <p:nvPr/>
+        </p:nvSpPr>
+        <p:spPr>
+          <a:xfrm>
+            <a:off x="6400800" y="1261872"/>
+            <a:ext cx="2286000" cy="2825496"/>
+          </a:xfrm>
+          <a:prstGeom prst="roundRect">
+            <a:avLst>
+              <a:gd name="adj" fmla="val 9000"/>
+            </a:avLst>
+          </a:prstGeom>
+          <a:solidFill>
+            <a:schemeClr val="bg2"/>
+          </a:solidFill>
+          <a:ln w="19050">
+            <a:solidFill>
+              <a:schemeClr val="tx1"/>
+            </a:solidFill>
+            <a:prstDash val="solid"/>
+          </a:ln>
+        </p:spPr>
+        <p:txBody>
+          <a:bodyPr/>
+          <a:lstStyle/>
+          <a:p>
+            <a:endParaRPr lang="en-US"/>
+          </a:p>
+        </p:txBody>
+      </p:sp>
+      <p:sp>
+        <p:nvSpPr>
+          <p:cNvPr id="43" name="QR caption"/>
+          <p:cNvSpPr txBox="1"/>
+          <p:nvPr/>
+        </p:nvSpPr>
+        <p:spPr>
+          <a:xfrm>
+            <a:off x="6492240" y="3035808"/>
+            <a:ext cx="2103120" cy="1005840"/>
+          </a:xfrm>
+          <a:prstGeom prst="rect">
+            <a:avLst/>
+          </a:prstGeom>
+          <a:noFill/>
+          <a:ln/>
+        </p:spPr>
+        <p:txBody>
+          <a:bodyPr wrap="square" lIns="0" tIns="0" rIns="0" bIns="0" rtlCol="0" anchor="t"/>
+          <a:lstStyle/>
+          <a:p>
+            <a:pPr algn="ctr">
+              <a:buNone/>
+            </a:pPr>
+            <a:r>
+              <a:rPr lang="en-GB" sz="1300" b="1" dirty="0">
+                <a:solidFill>
+                  <a:schemeClr val="accent2"/>
+                </a:solidFill>
+                <a:latin typeface="Calibri" pitchFamily="34" charset="0"/>
+                <a:ea typeface="Calibri" pitchFamily="34" charset="-122"/>
+                <a:cs typeface="Calibri" pitchFamily="34" charset="-120"/>
+              </a:rPr>
+              <a:t>Scan to open the repo</a:t>
+            </a:r>
+          </a:p>
+          <a:p>
+            <a:pPr algn="ctr">
+              <a:buNone/>
+            </a:pPr>
+            <a:r>
+              <a:rPr lang="en-GB" sz="1000" b="0" dirty="0">
+                <a:solidFill>
+                  <a:schemeClr val="tx1"/>
+                </a:solidFill>
+                <a:latin typeface="Calibri" pitchFamily="34" charset="0"/>
+                <a:ea typeface="Calibri" pitchFamily="34" charset="-122"/>
+                <a:cs typeface="Calibri" pitchFamily="34" charset="-120"/>
+                <a:hlinkClick r:id="rId3"/>
+              </a:rPr>
+              <a:t>github.com/VissitingLiam/sipho-algorithm-story</a:t>
+            </a:r>
+            <a:endParaRPr lang="en-GB" sz="1000" b="0" dirty="0">
+              <a:solidFill>
+                <a:schemeClr val="tx1"/>
+              </a:solidFill>
+              <a:latin typeface="Calibri" pitchFamily="34" charset="0"/>
+              <a:ea typeface="Calibri" pitchFamily="34" charset="-122"/>
+              <a:cs typeface="Calibri" pitchFamily="34" charset="-120"/>
+            </a:endParaRPr>
+          </a:p>
+        </p:txBody>
+      </p:sp>
+      <p:sp>
+        <p:nvSpPr>
+          <p:cNvPr id="34" name="Slide Number Placeholder 0">
+            <a:extLst>
+              <a:ext uri="{FF2B5EF4-FFF2-40B4-BE49-F238E27FC236}">
+                <a16:creationId xmlns:a16="http://schemas.microsoft.com/office/drawing/2014/main" id="{5E615962-F468-A188-430C-69B279F227E1}"/>
+              </a:ext>
+            </a:extLst>
+          </p:cNvPr>
+          <p:cNvSpPr>
+            <a:spLocks noGrp="1"/>
+          </p:cNvSpPr>
+          <p:nvPr>
+            <p:ph type="sldNum" sz="quarter" idx="4294967295"/>
+          </p:nvPr>
+        </p:nvSpPr>
+        <p:spPr>
+          <a:xfrm>
+            <a:off x="8229600" y="4754880"/>
+            <a:ext cx="457200" cy="274320"/>
+          </a:xfrm>
+          <a:prstGeom prst="rect">
+            <a:avLst/>
+          </a:prstGeom>
+          <a:extLst>
+            <a:ext uri="{C572A759-6A51-4108-AA02-DFA0A04FC94B}">
+              <ma14:wrappingTextBoxFlag xmlns:ma14="http://schemas.microsoft.com/office/mac/drawingml/2011/main" xmlns="" val="0"/>
+            </a:ext>
+          </a:extLst>
+        </p:spPr>
+        <p:txBody>
+          <a:bodyPr/>
+          <a:lstStyle>
+            <a:lvl1pPr>
+              <a:defRPr sz="1000">
+                <a:solidFill>
+                  <a:schemeClr val="tx2"/>
+                </a:solidFill>
+              </a:defRPr>
+            </a:lvl1pPr>
+          </a:lstStyle>
+          <a:p>
+            <a:pPr algn="l"/>
+            <a:fld id="{F7021451-1387-4CA6-816F-3879F97B5CBC}" type="slidenum">
+              <a:rPr lang="en-US" b="0"/>
+              <a:t>3</a:t>
+            </a:fld>
+            <a:endParaRPr lang="en-US"/>
+          </a:p>
+        </p:txBody>
+      </p:sp>
+      <p:pic>
+        <p:nvPicPr>
+          <p:cNvPr id="29" name="Picture 28">
+            <a:extLst>
+              <a:ext uri="{FF2B5EF4-FFF2-40B4-BE49-F238E27FC236}">
+                <a16:creationId xmlns:a16="http://schemas.microsoft.com/office/drawing/2014/main" id="{C8936AE8-29EF-0D12-4A83-EAF4C4538DFA}"/>
+              </a:ext>
+            </a:extLst>
+          </p:cNvPr>
+          <p:cNvPicPr>
+            <a:picLocks noChangeAspect="1"/>
+          </p:cNvPicPr>
+          <p:nvPr/>
+        </p:nvPicPr>
+        <p:blipFill>
+          <a:blip r:embed="rId4"/>
+          <a:stretch>
+            <a:fillRect/>
+          </a:stretch>
+        </p:blipFill>
+        <p:spPr>
+          <a:xfrm>
+            <a:off x="6793992" y="1493710"/>
+            <a:ext cx="1496378" cy="1496378"/>
+          </a:xfrm>
+          <a:prstGeom prst="rect">
+            <a:avLst/>
+          </a:prstGeom>
+        </p:spPr>
+      </p:pic>
+    </p:spTree>
+    <p:extLst>
+      <p:ext uri="{BB962C8B-B14F-4D97-AF65-F5344CB8AC3E}">
+        <p14:creationId xmlns:p14="http://schemas.microsoft.com/office/powerpoint/2010/main" val="1799673163"/>
+      </p:ext>
+    </p:extLst>
+  </p:cSld>
+  <p:clrMapOvr>
+    <a:masterClrMapping/>
+  </p:clrMapOvr>
+</p:sld>
+</file>
+
+<file path=ppt/slides/slide4.xml><?xml version="1.0" encoding="utf-8"?>
 <p:sld xmlns:a="http://schemas.openxmlformats.org/drawingml/2006/main" xmlns:r="http://schemas.openxmlformats.org/officeDocument/2006/relationships" xmlns:p="http://schemas.openxmlformats.org/presentationml/2006/main">
   <p:cSld name="Slide 3">
     <p:spTree>
@@ -3038,9 +4310,11 @@
       <p:sp>
         <p:nvSpPr>
           <p:cNvPr id="2" name="Text 0"/>
-          <p:cNvSpPr/>
+          <p:cNvSpPr>
+            <a:spLocks noGrp="1"/>
+          </p:cNvSpPr>
           <p:nvPr>
-            <p:ph idx="100" type="title" hasCustomPrompt="1"/>
+            <p:ph type="title" idx="100" hasCustomPrompt="1"/>
           </p:nvPr>
         </p:nvSpPr>
         <p:spPr>
@@ -3058,7 +4332,7 @@
           <a:bodyPr wrap="square" lIns="0" tIns="0" rIns="0" bIns="0" rtlCol="0" anchor="ctr"/>
           <a:lstStyle/>
           <a:p>
-            <a:pPr algn="l" indent="0" marL="0">
+            <a:pPr marL="0" indent="0" algn="l">
               <a:buNone/>
             </a:pPr>
             <a:r>
@@ -3094,7 +4368,7 @@
           <a:bodyPr wrap="square" lIns="0" tIns="0" rIns="0" bIns="0" rtlCol="0" anchor="ctr"/>
           <a:lstStyle/>
           <a:p>
-            <a:pPr indent="0" marL="0">
+            <a:pPr marL="0" indent="0">
               <a:buNone/>
             </a:pPr>
             <a:r>
@@ -3138,6 +4412,13 @@
             <a:prstDash val="solid"/>
           </a:ln>
         </p:spPr>
+        <p:txBody>
+          <a:bodyPr/>
+          <a:lstStyle/>
+          <a:p>
+            <a:endParaRPr lang="en-US"/>
+          </a:p>
+        </p:txBody>
       </p:sp>
       <p:sp>
         <p:nvSpPr>
@@ -3165,6 +4446,13 @@
             <a:prstDash val="solid"/>
           </a:ln>
         </p:spPr>
+        <p:txBody>
+          <a:bodyPr/>
+          <a:lstStyle/>
+          <a:p>
+            <a:endParaRPr lang="en-US"/>
+          </a:p>
+        </p:txBody>
       </p:sp>
       <p:sp>
         <p:nvSpPr>
@@ -3192,6 +4480,13 @@
             <a:prstDash val="solid"/>
           </a:ln>
         </p:spPr>
+        <p:txBody>
+          <a:bodyPr/>
+          <a:lstStyle/>
+          <a:p>
+            <a:endParaRPr lang="en-US"/>
+          </a:p>
+        </p:txBody>
       </p:sp>
       <p:sp>
         <p:nvSpPr>
@@ -3214,7 +4509,7 @@
           <a:bodyPr wrap="square" lIns="0" tIns="0" rIns="0" bIns="0" rtlCol="0" anchor="ctr"/>
           <a:lstStyle/>
           <a:p>
-            <a:pPr indent="0" marL="0">
+            <a:pPr marL="0" indent="0">
               <a:buNone/>
             </a:pPr>
             <a:r>
@@ -3253,7 +4548,7 @@
           <a:bodyPr wrap="square" lIns="0" tIns="0" rIns="0" bIns="0" rtlCol="0" anchor="t"/>
           <a:lstStyle/>
           <a:p>
-            <a:pPr indent="0" marL="0">
+            <a:pPr marL="0" indent="0">
               <a:buNone/>
             </a:pPr>
             <a:r>
@@ -3297,6 +4592,13 @@
             <a:prstDash val="solid"/>
           </a:ln>
         </p:spPr>
+        <p:txBody>
+          <a:bodyPr/>
+          <a:lstStyle/>
+          <a:p>
+            <a:endParaRPr lang="en-US"/>
+          </a:p>
+        </p:txBody>
       </p:sp>
       <p:sp>
         <p:nvSpPr>
@@ -3324,6 +4626,13 @@
             <a:prstDash val="solid"/>
           </a:ln>
         </p:spPr>
+        <p:txBody>
+          <a:bodyPr/>
+          <a:lstStyle/>
+          <a:p>
+            <a:endParaRPr lang="en-US"/>
+          </a:p>
+        </p:txBody>
       </p:sp>
       <p:sp>
         <p:nvSpPr>
@@ -3349,6 +4658,13 @@
             <a:prstDash val="solid"/>
           </a:ln>
         </p:spPr>
+        <p:txBody>
+          <a:bodyPr/>
+          <a:lstStyle/>
+          <a:p>
+            <a:endParaRPr lang="en-US"/>
+          </a:p>
+        </p:txBody>
       </p:sp>
       <p:sp>
         <p:nvSpPr>
@@ -3371,7 +4687,7 @@
           <a:bodyPr wrap="square" lIns="0" tIns="0" rIns="0" bIns="0" rtlCol="0" anchor="ctr"/>
           <a:lstStyle/>
           <a:p>
-            <a:pPr indent="0" marL="0">
+            <a:pPr marL="0" indent="0">
               <a:buNone/>
             </a:pPr>
             <a:r>
@@ -3410,7 +4726,7 @@
           <a:bodyPr wrap="square" lIns="0" tIns="0" rIns="0" bIns="0" rtlCol="0" anchor="t"/>
           <a:lstStyle/>
           <a:p>
-            <a:pPr indent="0" marL="0">
+            <a:pPr marL="0" indent="0">
               <a:buNone/>
             </a:pPr>
             <a:r>
@@ -3454,6 +4770,13 @@
             <a:prstDash val="solid"/>
           </a:ln>
         </p:spPr>
+        <p:txBody>
+          <a:bodyPr/>
+          <a:lstStyle/>
+          <a:p>
+            <a:endParaRPr lang="en-US"/>
+          </a:p>
+        </p:txBody>
       </p:sp>
       <p:sp>
         <p:nvSpPr>
@@ -3481,6 +4804,13 @@
             <a:prstDash val="solid"/>
           </a:ln>
         </p:spPr>
+        <p:txBody>
+          <a:bodyPr/>
+          <a:lstStyle/>
+          <a:p>
+            <a:endParaRPr lang="en-US"/>
+          </a:p>
+        </p:txBody>
       </p:sp>
       <p:sp>
         <p:nvSpPr>
@@ -3506,6 +4836,13 @@
             <a:prstDash val="solid"/>
           </a:ln>
         </p:spPr>
+        <p:txBody>
+          <a:bodyPr/>
+          <a:lstStyle/>
+          <a:p>
+            <a:endParaRPr lang="en-US"/>
+          </a:p>
+        </p:txBody>
       </p:sp>
       <p:sp>
         <p:nvSpPr>
@@ -3528,7 +4865,7 @@
           <a:bodyPr wrap="square" lIns="0" tIns="0" rIns="0" bIns="0" rtlCol="0" anchor="ctr"/>
           <a:lstStyle/>
           <a:p>
-            <a:pPr indent="0" marL="0">
+            <a:pPr marL="0" indent="0">
               <a:buNone/>
             </a:pPr>
             <a:r>
@@ -3567,7 +4904,7 @@
           <a:bodyPr wrap="square" lIns="0" tIns="0" rIns="0" bIns="0" rtlCol="0" anchor="t"/>
           <a:lstStyle/>
           <a:p>
-            <a:pPr indent="0" marL="0">
+            <a:pPr marL="0" indent="0">
               <a:buNone/>
             </a:pPr>
             <a:r>
@@ -3611,6 +4948,13 @@
             <a:prstDash val="solid"/>
           </a:ln>
         </p:spPr>
+        <p:txBody>
+          <a:bodyPr/>
+          <a:lstStyle/>
+          <a:p>
+            <a:endParaRPr lang="en-US"/>
+          </a:p>
+        </p:txBody>
       </p:sp>
       <p:sp>
         <p:nvSpPr>
@@ -3638,6 +4982,13 @@
             <a:prstDash val="solid"/>
           </a:ln>
         </p:spPr>
+        <p:txBody>
+          <a:bodyPr/>
+          <a:lstStyle/>
+          <a:p>
+            <a:endParaRPr lang="en-US"/>
+          </a:p>
+        </p:txBody>
       </p:sp>
       <p:sp>
         <p:nvSpPr>
@@ -3660,7 +5011,7 @@
           <a:bodyPr wrap="square" lIns="0" tIns="0" rIns="0" bIns="0" rtlCol="0" anchor="ctr"/>
           <a:lstStyle/>
           <a:p>
-            <a:pPr indent="0" marL="0">
+            <a:pPr marL="0" indent="0">
               <a:buNone/>
             </a:pPr>
             <a:r>
@@ -3699,7 +5050,7 @@
           <a:bodyPr wrap="square" lIns="0" tIns="0" rIns="0" bIns="0" rtlCol="0" anchor="t"/>
           <a:lstStyle/>
           <a:p>
-            <a:pPr indent="0" marL="0">
+            <a:pPr marL="0" indent="0">
               <a:buNone/>
             </a:pPr>
             <a:r>
@@ -3716,7 +5067,7 @@
             <a:endParaRPr lang="en-US" sz="1400" dirty="0"/>
           </a:p>
           <a:p>
-            <a:pPr indent="0" marL="0">
+            <a:pPr marL="0" indent="0">
               <a:spcAft>
                 <a:spcPts val="800"/>
               </a:spcAft>
@@ -3736,7 +5087,7 @@
             <a:endParaRPr lang="en-US" sz="1400" dirty="0"/>
           </a:p>
           <a:p>
-            <a:pPr indent="0" marL="0">
+            <a:pPr marL="0" indent="0">
               <a:buNone/>
             </a:pPr>
             <a:r>
@@ -3753,7 +5104,7 @@
             <a:endParaRPr lang="en-US" sz="1400" dirty="0"/>
           </a:p>
           <a:p>
-            <a:pPr indent="0" marL="0">
+            <a:pPr marL="0" indent="0">
               <a:spcAft>
                 <a:spcPts val="800"/>
               </a:spcAft>
@@ -3773,7 +5124,7 @@
             <a:endParaRPr lang="en-US" sz="1400" dirty="0"/>
           </a:p>
           <a:p>
-            <a:pPr indent="0" marL="0">
+            <a:pPr marL="0" indent="0">
               <a:buNone/>
             </a:pPr>
             <a:r>
@@ -3790,7 +5141,7 @@
             <a:endParaRPr lang="en-US" sz="1400" dirty="0"/>
           </a:p>
           <a:p>
-            <a:pPr indent="0" marL="0">
+            <a:pPr marL="0" indent="0">
               <a:buNone/>
             </a:pPr>
             <a:r>
@@ -3828,7 +5179,7 @@
           </a:prstGeom>
           <a:extLst>
             <a:ext uri="{C572A759-6A51-4108-AA02-DFA0A04FC94B}">
-              <ma14:wrappingTextBoxFlag xmlns:ma14="http://schemas.microsoft.com/office/mac/drawingml/2011/main" val="0"/>
+              <ma14:wrappingTextBoxFlag xmlns:ma14="http://schemas.microsoft.com/office/mac/drawingml/2011/main" xmlns="" val="0"/>
             </a:ext>
           </a:extLst>
         </p:spPr>
@@ -3846,8 +5197,8 @@
           <a:p>
             <a:pPr algn="l"/>
             <a:fld id="{F7021451-1387-4CA6-816F-3879F97B5CBC}" type="slidenum">
-              <a:rPr b="0" lang="en-US"/>
-              <a:t>3</a:t>
+              <a:rPr lang="en-US" b="0"/>
+              <a:t>4</a:t>
             </a:fld>
             <a:endParaRPr lang="en-US"/>
           </a:p>
@@ -3861,9 +5212,9 @@
 </p:sld>
 </file>
 
-<file path=ppt/slides/slide4.xml><?xml version="1.0" encoding="utf-8"?>
+<file path=ppt/slides/slide5.xml><?xml version="1.0" encoding="utf-8"?>
 <p:sld xmlns:a="http://schemas.openxmlformats.org/drawingml/2006/main" xmlns:r="http://schemas.openxmlformats.org/officeDocument/2006/relationships" xmlns:p="http://schemas.openxmlformats.org/presentationml/2006/main">
-  <p:cSld name="Slide 4">
+  <p:cSld>
     <p:spTree>
       <p:nvGrpSpPr>
         <p:cNvPr id="1" name=""/>
@@ -3881,9 +5232,11 @@
       <p:sp>
         <p:nvSpPr>
           <p:cNvPr id="2" name="Text 0"/>
-          <p:cNvSpPr/>
+          <p:cNvSpPr>
+            <a:spLocks noGrp="1"/>
+          </p:cNvSpPr>
           <p:nvPr>
-            <p:ph idx="100" type="title" hasCustomPrompt="1"/>
+            <p:ph type="title" idx="100" hasCustomPrompt="1"/>
           </p:nvPr>
         </p:nvSpPr>
         <p:spPr>
@@ -3901,7 +5254,7 @@
           <a:bodyPr wrap="square" lIns="0" tIns="0" rIns="0" bIns="0" rtlCol="0" anchor="ctr"/>
           <a:lstStyle/>
           <a:p>
-            <a:pPr algn="l" indent="0" marL="0">
+            <a:pPr marL="0" indent="0" algn="l">
               <a:buNone/>
             </a:pPr>
             <a:r>
@@ -3937,7 +5290,7 @@
           <a:bodyPr wrap="square" lIns="0" tIns="0" rIns="0" bIns="0" rtlCol="0" anchor="ctr"/>
           <a:lstStyle/>
           <a:p>
-            <a:pPr indent="0" marL="0">
+            <a:pPr marL="0" indent="0">
               <a:buNone/>
             </a:pPr>
             <a:r>
@@ -3981,6 +5334,13 @@
             <a:prstDash val="solid"/>
           </a:ln>
         </p:spPr>
+        <p:txBody>
+          <a:bodyPr/>
+          <a:lstStyle/>
+          <a:p>
+            <a:endParaRPr lang="en-US"/>
+          </a:p>
+        </p:txBody>
       </p:sp>
       <p:sp>
         <p:nvSpPr>
@@ -4008,6 +5368,13 @@
             <a:prstDash val="solid"/>
           </a:ln>
         </p:spPr>
+        <p:txBody>
+          <a:bodyPr/>
+          <a:lstStyle/>
+          <a:p>
+            <a:endParaRPr lang="en-US"/>
+          </a:p>
+        </p:txBody>
       </p:sp>
       <p:sp>
         <p:nvSpPr>
@@ -4033,6 +5400,13 @@
             <a:prstDash val="solid"/>
           </a:ln>
         </p:spPr>
+        <p:txBody>
+          <a:bodyPr/>
+          <a:lstStyle/>
+          <a:p>
+            <a:endParaRPr lang="en-US"/>
+          </a:p>
+        </p:txBody>
       </p:sp>
       <p:sp>
         <p:nvSpPr>
@@ -4055,7 +5429,7 @@
           <a:bodyPr wrap="square" lIns="0" tIns="0" rIns="0" bIns="0" rtlCol="0" anchor="ctr"/>
           <a:lstStyle/>
           <a:p>
-            <a:pPr algn="ctr" indent="0" marL="0">
+            <a:pPr marL="0" indent="0" algn="ctr">
               <a:buNone/>
             </a:pPr>
             <a:r>
@@ -4094,7 +5468,7 @@
           <a:bodyPr wrap="square" lIns="0" tIns="0" rIns="0" bIns="0" rtlCol="0" anchor="ctr"/>
           <a:lstStyle/>
           <a:p>
-            <a:pPr indent="0" marL="0">
+            <a:pPr marL="0" indent="0">
               <a:buNone/>
             </a:pPr>
             <a:r>
@@ -4133,7 +5507,7 @@
           <a:bodyPr wrap="square" lIns="0" tIns="0" rIns="0" bIns="0" rtlCol="0" anchor="ctr"/>
           <a:lstStyle/>
           <a:p>
-            <a:pPr indent="0" marL="0">
+            <a:pPr marL="0" indent="0">
               <a:buNone/>
             </a:pPr>
             <a:r>
@@ -4172,7 +5546,7 @@
           <a:bodyPr wrap="square" lIns="0" tIns="0" rIns="0" bIns="0" rtlCol="0" anchor="t"/>
           <a:lstStyle/>
           <a:p>
-            <a:pPr indent="0" marL="0">
+            <a:pPr marL="0" indent="0">
               <a:buNone/>
             </a:pPr>
             <a:r>
@@ -4213,6 +5587,13 @@
             <a:tailEnd type="triangle"/>
           </a:ln>
         </p:spPr>
+        <p:txBody>
+          <a:bodyPr/>
+          <a:lstStyle/>
+          <a:p>
+            <a:endParaRPr lang="en-US"/>
+          </a:p>
+        </p:txBody>
       </p:sp>
       <p:sp>
         <p:nvSpPr>
@@ -4240,6 +5621,13 @@
             <a:prstDash val="solid"/>
           </a:ln>
         </p:spPr>
+        <p:txBody>
+          <a:bodyPr/>
+          <a:lstStyle/>
+          <a:p>
+            <a:endParaRPr lang="en-US"/>
+          </a:p>
+        </p:txBody>
       </p:sp>
       <p:sp>
         <p:nvSpPr>
@@ -4267,6 +5655,13 @@
             <a:prstDash val="solid"/>
           </a:ln>
         </p:spPr>
+        <p:txBody>
+          <a:bodyPr/>
+          <a:lstStyle/>
+          <a:p>
+            <a:endParaRPr lang="en-US"/>
+          </a:p>
+        </p:txBody>
       </p:sp>
       <p:sp>
         <p:nvSpPr>
@@ -4292,6 +5687,13 @@
             <a:prstDash val="solid"/>
           </a:ln>
         </p:spPr>
+        <p:txBody>
+          <a:bodyPr/>
+          <a:lstStyle/>
+          <a:p>
+            <a:endParaRPr lang="en-US"/>
+          </a:p>
+        </p:txBody>
       </p:sp>
       <p:sp>
         <p:nvSpPr>
@@ -4314,7 +5716,7 @@
           <a:bodyPr wrap="square" lIns="0" tIns="0" rIns="0" bIns="0" rtlCol="0" anchor="ctr"/>
           <a:lstStyle/>
           <a:p>
-            <a:pPr algn="ctr" indent="0" marL="0">
+            <a:pPr marL="0" indent="0" algn="ctr">
               <a:buNone/>
             </a:pPr>
             <a:r>
@@ -4353,21 +5755,17 @@
           <a:bodyPr wrap="square" lIns="0" tIns="0" rIns="0" bIns="0" rtlCol="0" anchor="ctr"/>
           <a:lstStyle/>
           <a:p>
-            <a:pPr indent="0" marL="0">
+            <a:pPr marL="0" indent="0">
               <a:buNone/>
             </a:pPr>
             <a:r>
               <a:rPr lang="en-US" sz="2000" b="1" dirty="0">
-                <a:solidFill>
-                  <a:schemeClr val="tx1"/>
-                </a:solidFill>
                 <a:latin typeface="Calibri" pitchFamily="34" charset="0"/>
                 <a:ea typeface="Calibri" pitchFamily="34" charset="-122"/>
                 <a:cs typeface="Calibri" pitchFamily="34" charset="-120"/>
               </a:rPr>
-              <a:t>CJ</a:t>
-            </a:r>
-            <a:endParaRPr lang="en-US" sz="2000" dirty="0"/>
+              <a:t>Thabo</a:t>
+            </a:r>
           </a:p>
         </p:txBody>
       </p:sp>
@@ -4392,7 +5790,7 @@
           <a:bodyPr wrap="square" lIns="0" tIns="0" rIns="0" bIns="0" rtlCol="0" anchor="ctr"/>
           <a:lstStyle/>
           <a:p>
-            <a:pPr indent="0" marL="0">
+            <a:pPr marL="0" indent="0">
               <a:buNone/>
             </a:pPr>
             <a:r>
@@ -4431,7 +5829,7 @@
           <a:bodyPr wrap="square" lIns="0" tIns="0" rIns="0" bIns="0" rtlCol="0" anchor="t"/>
           <a:lstStyle/>
           <a:p>
-            <a:pPr indent="0" marL="0">
+            <a:pPr marL="0" indent="0">
               <a:buNone/>
             </a:pPr>
             <a:r>
@@ -4472,6 +5870,13 @@
             <a:tailEnd type="triangle"/>
           </a:ln>
         </p:spPr>
+        <p:txBody>
+          <a:bodyPr/>
+          <a:lstStyle/>
+          <a:p>
+            <a:endParaRPr lang="en-US"/>
+          </a:p>
+        </p:txBody>
       </p:sp>
       <p:sp>
         <p:nvSpPr>
@@ -4499,6 +5904,13 @@
             <a:prstDash val="solid"/>
           </a:ln>
         </p:spPr>
+        <p:txBody>
+          <a:bodyPr/>
+          <a:lstStyle/>
+          <a:p>
+            <a:endParaRPr lang="en-US"/>
+          </a:p>
+        </p:txBody>
       </p:sp>
       <p:sp>
         <p:nvSpPr>
@@ -4526,6 +5938,13 @@
             <a:prstDash val="solid"/>
           </a:ln>
         </p:spPr>
+        <p:txBody>
+          <a:bodyPr/>
+          <a:lstStyle/>
+          <a:p>
+            <a:endParaRPr lang="en-US"/>
+          </a:p>
+        </p:txBody>
       </p:sp>
       <p:sp>
         <p:nvSpPr>
@@ -4551,6 +5970,13 @@
             <a:prstDash val="solid"/>
           </a:ln>
         </p:spPr>
+        <p:txBody>
+          <a:bodyPr/>
+          <a:lstStyle/>
+          <a:p>
+            <a:endParaRPr lang="en-US"/>
+          </a:p>
+        </p:txBody>
       </p:sp>
       <p:sp>
         <p:nvSpPr>
@@ -4573,7 +5999,7 @@
           <a:bodyPr wrap="square" lIns="0" tIns="0" rIns="0" bIns="0" rtlCol="0" anchor="ctr"/>
           <a:lstStyle/>
           <a:p>
-            <a:pPr algn="ctr" indent="0" marL="0">
+            <a:pPr marL="0" indent="0" algn="ctr">
               <a:buNone/>
             </a:pPr>
             <a:r>
@@ -4612,7 +6038,7 @@
           <a:bodyPr wrap="square" lIns="0" tIns="0" rIns="0" bIns="0" rtlCol="0" anchor="ctr"/>
           <a:lstStyle/>
           <a:p>
-            <a:pPr indent="0" marL="0">
+            <a:pPr marL="0" indent="0">
               <a:buNone/>
             </a:pPr>
             <a:r>
@@ -4651,7 +6077,7 @@
           <a:bodyPr wrap="square" lIns="0" tIns="0" rIns="0" bIns="0" rtlCol="0" anchor="ctr"/>
           <a:lstStyle/>
           <a:p>
-            <a:pPr indent="0" marL="0">
+            <a:pPr marL="0" indent="0">
               <a:buNone/>
             </a:pPr>
             <a:r>
@@ -4690,7 +6116,7 @@
           <a:bodyPr wrap="square" lIns="0" tIns="0" rIns="0" bIns="0" rtlCol="0" anchor="t"/>
           <a:lstStyle/>
           <a:p>
-            <a:pPr indent="0" marL="0">
+            <a:pPr marL="0" indent="0">
               <a:buNone/>
             </a:pPr>
             <a:r>
@@ -4734,6 +6160,13 @@
             <a:prstDash val="solid"/>
           </a:ln>
         </p:spPr>
+        <p:txBody>
+          <a:bodyPr/>
+          <a:lstStyle/>
+          <a:p>
+            <a:endParaRPr lang="en-US"/>
+          </a:p>
+        </p:txBody>
       </p:sp>
       <p:sp>
         <p:nvSpPr>
@@ -4761,6 +6194,13 @@
             <a:prstDash val="solid"/>
           </a:ln>
         </p:spPr>
+        <p:txBody>
+          <a:bodyPr/>
+          <a:lstStyle/>
+          <a:p>
+            <a:endParaRPr lang="en-US"/>
+          </a:p>
+        </p:txBody>
       </p:sp>
       <p:sp>
         <p:nvSpPr>
@@ -4783,7 +6223,7 @@
           <a:bodyPr wrap="square" lIns="0" tIns="0" rIns="0" bIns="0" rtlCol="0" anchor="ctr"/>
           <a:lstStyle/>
           <a:p>
-            <a:pPr indent="0" marL="0">
+            <a:pPr marL="0" indent="0">
               <a:buNone/>
             </a:pPr>
             <a:r>
@@ -4797,9 +6237,6 @@
               </a:rPr>
               <a:t>Backup if tech fails: </a:t>
             </a:r>
-            <a:pPr indent="0" marL="0">
-              <a:buNone/>
-            </a:pPr>
             <a:r>
               <a:rPr lang="en-US" sz="1400" dirty="0">
                 <a:solidFill>
@@ -4809,7 +6246,7 @@
                 <a:ea typeface="Calibri" pitchFamily="34" charset="-122"/>
                 <a:cs typeface="Calibri" pitchFamily="34" charset="-120"/>
               </a:rPr>
-              <a:t>screenshots and a screen recording are ready.</a:t>
+              <a:t>Separate HTML file of Sipho’s morning.</a:t>
             </a:r>
             <a:endParaRPr lang="en-US" sz="1400" dirty="0"/>
           </a:p>
@@ -4817,7 +6254,7 @@
       </p:sp>
       <p:sp>
         <p:nvSpPr>
-          <p:cNvPr id="25" name="Slide Number Placeholder 0"/>
+          <p:cNvPr id="30" name="Slide Number Placeholder 0"/>
           <p:cNvSpPr>
             <a:spLocks noGrp="1"/>
           </p:cNvSpPr>
@@ -4835,7 +6272,7 @@
           </a:prstGeom>
           <a:extLst>
             <a:ext uri="{C572A759-6A51-4108-AA02-DFA0A04FC94B}">
-              <ma14:wrappingTextBoxFlag xmlns:ma14="http://schemas.microsoft.com/office/mac/drawingml/2011/main" val="0"/>
+              <ma14:wrappingTextBoxFlag xmlns="" xmlns:ma14="http://schemas.microsoft.com/office/mac/drawingml/2011/main" val="0"/>
             </a:ext>
           </a:extLst>
         </p:spPr>
@@ -4853,8 +6290,8 @@
           <a:p>
             <a:pPr algn="l"/>
             <a:fld id="{F7021451-1387-4CA6-816F-3879F97B5CBC}" type="slidenum">
-              <a:rPr b="0" lang="en-US"/>
-              <a:t>4</a:t>
+              <a:rPr lang="en-US" b="0"/>
+              <a:t>5</a:t>
             </a:fld>
             <a:endParaRPr lang="en-US"/>
           </a:p>
@@ -4868,7 +6305,7 @@
 </p:sld>
 </file>
 
-<file path=ppt/slides/slide5.xml><?xml version="1.0" encoding="utf-8"?>
+<file path=ppt/slides/slide6.xml><?xml version="1.0" encoding="utf-8"?>
 <p:sld xmlns:a="http://schemas.openxmlformats.org/drawingml/2006/main" xmlns:r="http://schemas.openxmlformats.org/officeDocument/2006/relationships" xmlns:p="http://schemas.openxmlformats.org/presentationml/2006/main">
   <p:cSld name="Slide 5">
     <p:spTree>
@@ -4888,9 +6325,11 @@
       <p:sp>
         <p:nvSpPr>
           <p:cNvPr id="2" name="Text 0"/>
-          <p:cNvSpPr/>
+          <p:cNvSpPr>
+            <a:spLocks noGrp="1"/>
+          </p:cNvSpPr>
           <p:nvPr>
-            <p:ph idx="100" type="title" hasCustomPrompt="1"/>
+            <p:ph type="title" idx="100" hasCustomPrompt="1"/>
           </p:nvPr>
         </p:nvSpPr>
         <p:spPr>
@@ -4908,7 +6347,7 @@
           <a:bodyPr wrap="square" lIns="0" tIns="0" rIns="0" bIns="0" rtlCol="0" anchor="ctr"/>
           <a:lstStyle/>
           <a:p>
-            <a:pPr algn="l" indent="0" marL="0">
+            <a:pPr marL="0" indent="0" algn="l">
               <a:buNone/>
             </a:pPr>
             <a:r>
@@ -4944,7 +6383,7 @@
           <a:bodyPr wrap="square" lIns="0" tIns="0" rIns="0" bIns="0" rtlCol="0" anchor="ctr"/>
           <a:lstStyle/>
           <a:p>
-            <a:pPr indent="0" marL="0">
+            <a:pPr marL="0" indent="0">
               <a:buNone/>
             </a:pPr>
             <a:r>
@@ -4985,8 +6424,20 @@
             <a:tbl>
               <a:tblPr/>
               <a:tblGrid>
-                <a:gridCol w="1828800"/>
-                <a:gridCol w="6400800"/>
+                <a:gridCol w="1828800">
+                  <a:extLst>
+                    <a:ext uri="{9D8B030D-6E8A-4147-A177-3AD203B41FA5}">
+                      <a16:colId xmlns:a16="http://schemas.microsoft.com/office/drawing/2014/main" val="20000"/>
+                    </a:ext>
+                  </a:extLst>
+                </a:gridCol>
+                <a:gridCol w="6400800">
+                  <a:extLst>
+                    <a:ext uri="{9D8B030D-6E8A-4147-A177-3AD203B41FA5}">
+                      <a16:colId xmlns:a16="http://schemas.microsoft.com/office/drawing/2014/main" val="20001"/>
+                    </a:ext>
+                  </a:extLst>
+                </a:gridCol>
               </a:tblGrid>
               <a:tr h="347472">
                 <a:tc>
@@ -4994,7 +6445,7 @@
                     <a:bodyPr/>
                     <a:lstStyle/>
                     <a:p>
-                      <a:pPr indent="0" marL="0">
+                      <a:pPr marL="0" indent="0">
                         <a:buNone/>
                       </a:pPr>
                       <a:r>
@@ -5062,7 +6513,7 @@
                     <a:bodyPr/>
                     <a:lstStyle/>
                     <a:p>
-                      <a:pPr indent="0" marL="0">
+                      <a:pPr marL="0" indent="0">
                         <a:buNone/>
                       </a:pPr>
                       <a:r>
@@ -5125,6 +6576,11 @@
                     </a:solidFill>
                   </a:tcPr>
                 </a:tc>
+                <a:extLst>
+                  <a:ext uri="{0D108BD9-81ED-4DB2-BD59-A6C34878D82A}">
+                    <a16:rowId xmlns:a16="http://schemas.microsoft.com/office/drawing/2014/main" val="10000"/>
+                  </a:ext>
+                </a:extLst>
               </a:tr>
               <a:tr h="502920">
                 <a:tc>
@@ -5132,7 +6588,7 @@
                     <a:bodyPr/>
                     <a:lstStyle/>
                     <a:p>
-                      <a:pPr indent="0" marL="0">
+                      <a:pPr marL="0" indent="0">
                         <a:buNone/>
                       </a:pPr>
                       <a:r>
@@ -5200,7 +6656,7 @@
                     <a:bodyPr/>
                     <a:lstStyle/>
                     <a:p>
-                      <a:pPr indent="0" marL="0">
+                      <a:pPr marL="0" indent="0">
                         <a:buNone/>
                       </a:pPr>
                       <a:r>
@@ -5263,6 +6719,11 @@
                     </a:solidFill>
                   </a:tcPr>
                 </a:tc>
+                <a:extLst>
+                  <a:ext uri="{0D108BD9-81ED-4DB2-BD59-A6C34878D82A}">
+                    <a16:rowId xmlns:a16="http://schemas.microsoft.com/office/drawing/2014/main" val="10001"/>
+                  </a:ext>
+                </a:extLst>
               </a:tr>
               <a:tr h="502920">
                 <a:tc>
@@ -5270,7 +6731,7 @@
                     <a:bodyPr/>
                     <a:lstStyle/>
                     <a:p>
-                      <a:pPr indent="0" marL="0">
+                      <a:pPr marL="0" indent="0">
                         <a:buNone/>
                       </a:pPr>
                       <a:r>
@@ -5338,7 +6799,7 @@
                     <a:bodyPr/>
                     <a:lstStyle/>
                     <a:p>
-                      <a:pPr indent="0" marL="0">
+                      <a:pPr marL="0" indent="0">
                         <a:buNone/>
                       </a:pPr>
                       <a:r>
@@ -5401,6 +6862,11 @@
                     </a:solidFill>
                   </a:tcPr>
                 </a:tc>
+                <a:extLst>
+                  <a:ext uri="{0D108BD9-81ED-4DB2-BD59-A6C34878D82A}">
+                    <a16:rowId xmlns:a16="http://schemas.microsoft.com/office/drawing/2014/main" val="10002"/>
+                  </a:ext>
+                </a:extLst>
               </a:tr>
               <a:tr h="502920">
                 <a:tc>
@@ -5408,7 +6874,7 @@
                     <a:bodyPr/>
                     <a:lstStyle/>
                     <a:p>
-                      <a:pPr indent="0" marL="0">
+                      <a:pPr marL="0" indent="0">
                         <a:buNone/>
                       </a:pPr>
                       <a:r>
@@ -5476,7 +6942,7 @@
                     <a:bodyPr/>
                     <a:lstStyle/>
                     <a:p>
-                      <a:pPr indent="0" marL="0">
+                      <a:pPr marL="0" indent="0">
                         <a:buNone/>
                       </a:pPr>
                       <a:r>
@@ -5539,6 +7005,11 @@
                     </a:solidFill>
                   </a:tcPr>
                 </a:tc>
+                <a:extLst>
+                  <a:ext uri="{0D108BD9-81ED-4DB2-BD59-A6C34878D82A}">
+                    <a16:rowId xmlns:a16="http://schemas.microsoft.com/office/drawing/2014/main" val="10003"/>
+                  </a:ext>
+                </a:extLst>
               </a:tr>
               <a:tr h="502920">
                 <a:tc>
@@ -5546,7 +7017,7 @@
                     <a:bodyPr/>
                     <a:lstStyle/>
                     <a:p>
-                      <a:pPr indent="0" marL="0">
+                      <a:pPr marL="0" indent="0">
                         <a:buNone/>
                       </a:pPr>
                       <a:r>
@@ -5614,7 +7085,7 @@
                     <a:bodyPr/>
                     <a:lstStyle/>
                     <a:p>
-                      <a:pPr indent="0" marL="0">
+                      <a:pPr marL="0" indent="0">
                         <a:buNone/>
                       </a:pPr>
                       <a:r>
@@ -5677,6 +7148,11 @@
                     </a:solidFill>
                   </a:tcPr>
                 </a:tc>
+                <a:extLst>
+                  <a:ext uri="{0D108BD9-81ED-4DB2-BD59-A6C34878D82A}">
+                    <a16:rowId xmlns:a16="http://schemas.microsoft.com/office/drawing/2014/main" val="10004"/>
+                  </a:ext>
+                </a:extLst>
               </a:tr>
               <a:tr h="502920">
                 <a:tc>
@@ -5684,7 +7160,7 @@
                     <a:bodyPr/>
                     <a:lstStyle/>
                     <a:p>
-                      <a:pPr indent="0" marL="0">
+                      <a:pPr marL="0" indent="0">
                         <a:buNone/>
                       </a:pPr>
                       <a:r>
@@ -5752,7 +7228,7 @@
                     <a:bodyPr/>
                     <a:lstStyle/>
                     <a:p>
-                      <a:pPr indent="0" marL="0">
+                      <a:pPr marL="0" indent="0">
                         <a:buNone/>
                       </a:pPr>
                       <a:r>
@@ -5815,6 +7291,11 @@
                     </a:solidFill>
                   </a:tcPr>
                 </a:tc>
+                <a:extLst>
+                  <a:ext uri="{0D108BD9-81ED-4DB2-BD59-A6C34878D82A}">
+                    <a16:rowId xmlns:a16="http://schemas.microsoft.com/office/drawing/2014/main" val="10005"/>
+                  </a:ext>
+                </a:extLst>
               </a:tr>
               <a:tr h="502920">
                 <a:tc>
@@ -5822,7 +7303,7 @@
                     <a:bodyPr/>
                     <a:lstStyle/>
                     <a:p>
-                      <a:pPr indent="0" marL="0">
+                      <a:pPr marL="0" indent="0">
                         <a:buNone/>
                       </a:pPr>
                       <a:r>
@@ -5890,7 +7371,7 @@
                     <a:bodyPr/>
                     <a:lstStyle/>
                     <a:p>
-                      <a:pPr indent="0" marL="0">
+                      <a:pPr marL="0" indent="0">
                         <a:buNone/>
                       </a:pPr>
                       <a:r>
@@ -5953,6 +7434,11 @@
                     </a:solidFill>
                   </a:tcPr>
                 </a:tc>
+                <a:extLst>
+                  <a:ext uri="{0D108BD9-81ED-4DB2-BD59-A6C34878D82A}">
+                    <a16:rowId xmlns:a16="http://schemas.microsoft.com/office/drawing/2014/main" val="10006"/>
+                  </a:ext>
+                </a:extLst>
               </a:tr>
             </a:tbl>
           </a:graphicData>
@@ -5978,7 +7464,7 @@
           </a:prstGeom>
           <a:extLst>
             <a:ext uri="{C572A759-6A51-4108-AA02-DFA0A04FC94B}">
-              <ma14:wrappingTextBoxFlag xmlns:ma14="http://schemas.microsoft.com/office/mac/drawingml/2011/main" val="0"/>
+              <ma14:wrappingTextBoxFlag xmlns:ma14="http://schemas.microsoft.com/office/mac/drawingml/2011/main" xmlns="" val="0"/>
             </a:ext>
           </a:extLst>
         </p:spPr>
@@ -5996,8 +7482,8 @@
           <a:p>
             <a:pPr algn="l"/>
             <a:fld id="{F7021451-1387-4CA6-816F-3879F97B5CBC}" type="slidenum">
-              <a:rPr b="0" lang="en-US"/>
-              <a:t>5</a:t>
+              <a:rPr lang="en-US" b="0"/>
+              <a:t>6</a:t>
             </a:fld>
             <a:endParaRPr lang="en-US"/>
           </a:p>
@@ -6011,7 +7497,7 @@
 </p:sld>
 </file>
 
-<file path=ppt/slides/slide6.xml><?xml version="1.0" encoding="utf-8"?>
+<file path=ppt/slides/slide7.xml><?xml version="1.0" encoding="utf-8"?>
 <p:sld xmlns:a="http://schemas.openxmlformats.org/drawingml/2006/main" xmlns:r="http://schemas.openxmlformats.org/officeDocument/2006/relationships" xmlns:p="http://schemas.openxmlformats.org/presentationml/2006/main">
   <p:cSld name="Slide 6">
     <p:spTree>
@@ -6031,9 +7517,11 @@
       <p:sp>
         <p:nvSpPr>
           <p:cNvPr id="2" name="Text 0"/>
-          <p:cNvSpPr/>
+          <p:cNvSpPr>
+            <a:spLocks noGrp="1"/>
+          </p:cNvSpPr>
           <p:nvPr>
-            <p:ph idx="100" type="title" hasCustomPrompt="1"/>
+            <p:ph type="title" idx="100" hasCustomPrompt="1"/>
           </p:nvPr>
         </p:nvSpPr>
         <p:spPr>
@@ -6051,7 +7539,7 @@
           <a:bodyPr wrap="square" lIns="0" tIns="0" rIns="0" bIns="0" rtlCol="0" anchor="ctr"/>
           <a:lstStyle/>
           <a:p>
-            <a:pPr algn="l" indent="0" marL="0">
+            <a:pPr marL="0" indent="0" algn="l">
               <a:buNone/>
             </a:pPr>
             <a:r>
@@ -6087,7 +7575,7 @@
           <a:bodyPr wrap="square" lIns="0" tIns="0" rIns="0" bIns="0" rtlCol="0" anchor="ctr"/>
           <a:lstStyle/>
           <a:p>
-            <a:pPr indent="0" marL="0">
+            <a:pPr marL="0" indent="0">
               <a:buNone/>
             </a:pPr>
             <a:r>
@@ -6131,6 +7619,13 @@
             <a:prstDash val="solid"/>
           </a:ln>
         </p:spPr>
+        <p:txBody>
+          <a:bodyPr/>
+          <a:lstStyle/>
+          <a:p>
+            <a:endParaRPr lang="en-US"/>
+          </a:p>
+        </p:txBody>
       </p:sp>
       <p:sp>
         <p:nvSpPr>
@@ -6158,6 +7653,13 @@
             <a:prstDash val="solid"/>
           </a:ln>
         </p:spPr>
+        <p:txBody>
+          <a:bodyPr/>
+          <a:lstStyle/>
+          <a:p>
+            <a:endParaRPr lang="en-US"/>
+          </a:p>
+        </p:txBody>
       </p:sp>
       <p:sp>
         <p:nvSpPr>
@@ -6185,6 +7687,13 @@
             <a:prstDash val="solid"/>
           </a:ln>
         </p:spPr>
+        <p:txBody>
+          <a:bodyPr/>
+          <a:lstStyle/>
+          <a:p>
+            <a:endParaRPr lang="en-US"/>
+          </a:p>
+        </p:txBody>
       </p:sp>
       <p:sp>
         <p:nvSpPr>
@@ -6207,7 +7716,7 @@
           <a:bodyPr wrap="square" lIns="0" tIns="0" rIns="0" bIns="0" rtlCol="0" anchor="ctr"/>
           <a:lstStyle/>
           <a:p>
-            <a:pPr indent="0" marL="0">
+            <a:pPr marL="0" indent="0">
               <a:buNone/>
             </a:pPr>
             <a:r>
@@ -6246,7 +7755,7 @@
           <a:bodyPr wrap="square" lIns="0" tIns="0" rIns="0" bIns="0" rtlCol="0" anchor="ctr"/>
           <a:lstStyle/>
           <a:p>
-            <a:pPr indent="0" marL="0">
+            <a:pPr marL="0" indent="0">
               <a:buNone/>
             </a:pPr>
             <a:r>
@@ -6285,7 +7794,7 @@
           <a:bodyPr wrap="square" lIns="0" tIns="0" rIns="0" bIns="0" rtlCol="0" anchor="t"/>
           <a:lstStyle/>
           <a:p>
-            <a:pPr indent="0" marL="0">
+            <a:pPr marL="0" indent="0">
               <a:buNone/>
             </a:pPr>
             <a:r>
@@ -6329,6 +7838,13 @@
             <a:prstDash val="solid"/>
           </a:ln>
         </p:spPr>
+        <p:txBody>
+          <a:bodyPr/>
+          <a:lstStyle/>
+          <a:p>
+            <a:endParaRPr lang="en-US"/>
+          </a:p>
+        </p:txBody>
       </p:sp>
       <p:sp>
         <p:nvSpPr>
@@ -6356,6 +7872,13 @@
             <a:prstDash val="solid"/>
           </a:ln>
         </p:spPr>
+        <p:txBody>
+          <a:bodyPr/>
+          <a:lstStyle/>
+          <a:p>
+            <a:endParaRPr lang="en-US"/>
+          </a:p>
+        </p:txBody>
       </p:sp>
       <p:sp>
         <p:nvSpPr>
@@ -6381,6 +7904,13 @@
             <a:prstDash val="solid"/>
           </a:ln>
         </p:spPr>
+        <p:txBody>
+          <a:bodyPr/>
+          <a:lstStyle/>
+          <a:p>
+            <a:endParaRPr lang="en-US"/>
+          </a:p>
+        </p:txBody>
       </p:sp>
       <p:sp>
         <p:nvSpPr>
@@ -6403,7 +7933,7 @@
           <a:bodyPr wrap="square" lIns="0" tIns="0" rIns="0" bIns="0" rtlCol="0" anchor="ctr"/>
           <a:lstStyle/>
           <a:p>
-            <a:pPr indent="0" marL="0">
+            <a:pPr marL="0" indent="0">
               <a:buNone/>
             </a:pPr>
             <a:r>
@@ -6442,7 +7972,7 @@
           <a:bodyPr wrap="square" lIns="0" tIns="0" rIns="0" bIns="0" rtlCol="0" anchor="ctr"/>
           <a:lstStyle/>
           <a:p>
-            <a:pPr indent="0" marL="0">
+            <a:pPr marL="0" indent="0">
               <a:buNone/>
             </a:pPr>
             <a:r>
@@ -6481,7 +8011,7 @@
           <a:bodyPr wrap="square" lIns="0" tIns="0" rIns="0" bIns="0" rtlCol="0" anchor="t"/>
           <a:lstStyle/>
           <a:p>
-            <a:pPr indent="0" marL="0">
+            <a:pPr marL="0" indent="0">
               <a:buNone/>
             </a:pPr>
             <a:r>
@@ -6525,6 +8055,13 @@
             <a:prstDash val="solid"/>
           </a:ln>
         </p:spPr>
+        <p:txBody>
+          <a:bodyPr/>
+          <a:lstStyle/>
+          <a:p>
+            <a:endParaRPr lang="en-US"/>
+          </a:p>
+        </p:txBody>
       </p:sp>
       <p:sp>
         <p:nvSpPr>
@@ -6552,6 +8089,13 @@
             <a:prstDash val="solid"/>
           </a:ln>
         </p:spPr>
+        <p:txBody>
+          <a:bodyPr/>
+          <a:lstStyle/>
+          <a:p>
+            <a:endParaRPr lang="en-US"/>
+          </a:p>
+        </p:txBody>
       </p:sp>
       <p:sp>
         <p:nvSpPr>
@@ -6577,6 +8121,13 @@
             <a:prstDash val="solid"/>
           </a:ln>
         </p:spPr>
+        <p:txBody>
+          <a:bodyPr/>
+          <a:lstStyle/>
+          <a:p>
+            <a:endParaRPr lang="en-US"/>
+          </a:p>
+        </p:txBody>
       </p:sp>
       <p:sp>
         <p:nvSpPr>
@@ -6599,7 +8150,7 @@
           <a:bodyPr wrap="square" lIns="0" tIns="0" rIns="0" bIns="0" rtlCol="0" anchor="ctr"/>
           <a:lstStyle/>
           <a:p>
-            <a:pPr indent="0" marL="0">
+            <a:pPr marL="0" indent="0">
               <a:buNone/>
             </a:pPr>
             <a:r>
@@ -6638,7 +8189,7 @@
           <a:bodyPr wrap="square" lIns="0" tIns="0" rIns="0" bIns="0" rtlCol="0" anchor="ctr"/>
           <a:lstStyle/>
           <a:p>
-            <a:pPr indent="0" marL="0">
+            <a:pPr marL="0" indent="0">
               <a:buNone/>
             </a:pPr>
             <a:r>
@@ -6677,7 +8228,7 @@
           <a:bodyPr wrap="square" lIns="0" tIns="0" rIns="0" bIns="0" rtlCol="0" anchor="t"/>
           <a:lstStyle/>
           <a:p>
-            <a:pPr indent="0" marL="0">
+            <a:pPr marL="0" indent="0">
               <a:buNone/>
             </a:pPr>
             <a:r>
@@ -6721,6 +8272,13 @@
             <a:prstDash val="solid"/>
           </a:ln>
         </p:spPr>
+        <p:txBody>
+          <a:bodyPr/>
+          <a:lstStyle/>
+          <a:p>
+            <a:endParaRPr lang="en-US"/>
+          </a:p>
+        </p:txBody>
       </p:sp>
       <p:sp>
         <p:nvSpPr>
@@ -6748,6 +8306,13 @@
             <a:prstDash val="solid"/>
           </a:ln>
         </p:spPr>
+        <p:txBody>
+          <a:bodyPr/>
+          <a:lstStyle/>
+          <a:p>
+            <a:endParaRPr lang="en-US"/>
+          </a:p>
+        </p:txBody>
       </p:sp>
       <p:sp>
         <p:nvSpPr>
@@ -6770,7 +8335,7 @@
           <a:bodyPr wrap="square" lIns="0" tIns="0" rIns="0" bIns="0" rtlCol="0" anchor="ctr"/>
           <a:lstStyle/>
           <a:p>
-            <a:pPr indent="0" marL="0">
+            <a:pPr marL="0" indent="0">
               <a:buNone/>
             </a:pPr>
             <a:r>
@@ -6784,9 +8349,6 @@
               </a:rPr>
               <a:t>Next step: </a:t>
             </a:r>
-            <a:pPr indent="0" marL="0">
-              <a:buNone/>
-            </a:pPr>
             <a:r>
               <a:rPr lang="en-US" sz="1400" dirty="0">
                 <a:solidFill>
@@ -6822,7 +8384,7 @@
           </a:prstGeom>
           <a:extLst>
             <a:ext uri="{C572A759-6A51-4108-AA02-DFA0A04FC94B}">
-              <ma14:wrappingTextBoxFlag xmlns:ma14="http://schemas.microsoft.com/office/mac/drawingml/2011/main" val="0"/>
+              <ma14:wrappingTextBoxFlag xmlns:ma14="http://schemas.microsoft.com/office/mac/drawingml/2011/main" xmlns="" val="0"/>
             </a:ext>
           </a:extLst>
         </p:spPr>
@@ -6840,8 +8402,8 @@
           <a:p>
             <a:pPr algn="l"/>
             <a:fld id="{F7021451-1387-4CA6-816F-3879F97B5CBC}" type="slidenum">
-              <a:rPr b="0" lang="en-US"/>
-              <a:t>6</a:t>
+              <a:rPr lang="en-US" b="0"/>
+              <a:t>7</a:t>
             </a:fld>
             <a:endParaRPr lang="en-US"/>
           </a:p>
@@ -6855,7 +8417,265 @@
 </p:sld>
 </file>
 
-<file path=ppt/slides/slide7.xml><?xml version="1.0" encoding="utf-8"?>
+<file path=ppt/slides/slide8.xml><?xml version="1.0" encoding="utf-8"?>
+<p:sld xmlns:a="http://schemas.openxmlformats.org/drawingml/2006/main" xmlns:r="http://schemas.openxmlformats.org/officeDocument/2006/relationships" xmlns:p="http://schemas.openxmlformats.org/presentationml/2006/main">
+  <p:cSld>
+    <p:spTree>
+      <p:nvGrpSpPr>
+        <p:cNvPr id="1" name=""/>
+        <p:cNvGrpSpPr/>
+        <p:nvPr/>
+      </p:nvGrpSpPr>
+      <p:grpSpPr>
+        <a:xfrm>
+          <a:off x="0" y="0"/>
+          <a:ext cx="0" cy="0"/>
+          <a:chOff x="0" y="0"/>
+          <a:chExt cx="0" cy="0"/>
+        </a:xfrm>
+      </p:grpSpPr>
+      <p:sp>
+        <p:nvSpPr>
+          <p:cNvPr id="2" name="Text 0"/>
+          <p:cNvSpPr>
+            <a:spLocks noGrp="1"/>
+          </p:cNvSpPr>
+          <p:nvPr>
+            <p:ph type="title" idx="100" hasCustomPrompt="1"/>
+          </p:nvPr>
+        </p:nvSpPr>
+        <p:spPr>
+          <a:xfrm>
+            <a:off x="457200" y="274320"/>
+            <a:ext cx="8229600" cy="777240"/>
+          </a:xfrm>
+          <a:prstGeom prst="rect">
+            <a:avLst/>
+          </a:prstGeom>
+          <a:noFill/>
+          <a:ln/>
+        </p:spPr>
+        <p:txBody>
+          <a:bodyPr wrap="square" lIns="0" tIns="0" rIns="0" bIns="0" rtlCol="0" anchor="ctr"/>
+          <a:lstStyle/>
+          <a:p>
+            <a:pPr marL="0" indent="0" algn="l">
+              <a:buNone/>
+            </a:pPr>
+            <a:r>
+              <a:rPr lang="en-US" sz="3400" b="1" dirty="0">
+                <a:solidFill>
+                  <a:schemeClr val="tx1"/>
+                </a:solidFill>
+              </a:rPr>
+              <a:t>References</a:t>
+            </a:r>
+            <a:endParaRPr lang="en-US" sz="3400" dirty="0"/>
+          </a:p>
+        </p:txBody>
+      </p:sp>
+      <p:sp>
+        <p:nvSpPr>
+          <p:cNvPr id="3" name="Text 1"/>
+          <p:cNvSpPr txBox="1"/>
+          <p:nvPr/>
+        </p:nvSpPr>
+        <p:spPr>
+          <a:xfrm>
+            <a:off x="457200" y="914400"/>
+            <a:ext cx="8229600" cy="274320"/>
+          </a:xfrm>
+          <a:prstGeom prst="rect">
+            <a:avLst/>
+          </a:prstGeom>
+          <a:noFill/>
+          <a:ln/>
+        </p:spPr>
+        <p:txBody>
+          <a:bodyPr wrap="square" lIns="0" tIns="0" rIns="0" bIns="0" rtlCol="0" anchor="ctr"/>
+          <a:lstStyle/>
+          <a:p>
+            <a:pPr marL="0" indent="0">
+              <a:buNone/>
+            </a:pPr>
+            <a:r>
+              <a:rPr lang="en-US" sz="1600" b="1" dirty="0">
+                <a:solidFill>
+                  <a:schemeClr val="accent2"/>
+                </a:solidFill>
+                <a:latin typeface="Calibri" pitchFamily="34" charset="0"/>
+                <a:ea typeface="Calibri" pitchFamily="34" charset="-122"/>
+                <a:cs typeface="Calibri" pitchFamily="34" charset="-120"/>
+              </a:rPr>
+              <a:t>Sources cited on the Gap slide</a:t>
+            </a:r>
+            <a:endParaRPr lang="en-US" sz="1600" dirty="0"/>
+          </a:p>
+        </p:txBody>
+      </p:sp>
+      <p:sp>
+        <p:nvSpPr>
+          <p:cNvPr id="4" name="References text"/>
+          <p:cNvSpPr txBox="1"/>
+          <p:nvPr/>
+        </p:nvSpPr>
+        <p:spPr>
+          <a:xfrm>
+            <a:off x="457200" y="1325880"/>
+            <a:ext cx="8229600" cy="2926080"/>
+          </a:xfrm>
+          <a:prstGeom prst="rect">
+            <a:avLst/>
+          </a:prstGeom>
+          <a:noFill/>
+          <a:ln/>
+        </p:spPr>
+        <p:txBody>
+          <a:bodyPr wrap="square" lIns="0" tIns="0" rIns="0" bIns="0" rtlCol="0" anchor="t"/>
+          <a:lstStyle/>
+          <a:p>
+            <a:pPr marL="342900" indent="-342900">
+              <a:spcAft>
+                <a:spcPts val="1800"/>
+              </a:spcAft>
+              <a:buNone/>
+            </a:pPr>
+            <a:r>
+              <a:rPr lang="en-GB" sz="1600" dirty="0">
+                <a:solidFill>
+                  <a:schemeClr val="tx1"/>
+                </a:solidFill>
+                <a:latin typeface="Calibri" pitchFamily="34" charset="0"/>
+                <a:ea typeface="Calibri" pitchFamily="34" charset="-122"/>
+                <a:cs typeface="Calibri" pitchFamily="34" charset="-120"/>
+              </a:rPr>
+              <a:t>Bati, T.B. and Workneh, A.W., 2021. Evaluating integrated use of information technologies in secondary schools of Ethiopia using design‐reality gap analysis: A school‐level study. </a:t>
+            </a:r>
+            <a:r>
+              <a:rPr lang="en-GB" sz="1600" i="1" dirty="0">
+                <a:solidFill>
+                  <a:schemeClr val="tx1"/>
+                </a:solidFill>
+                <a:latin typeface="Calibri" pitchFamily="34" charset="0"/>
+                <a:ea typeface="Calibri" pitchFamily="34" charset="-122"/>
+                <a:cs typeface="Calibri" pitchFamily="34" charset="-120"/>
+              </a:rPr>
+              <a:t>The electronic journal of information systems in developing countries</a:t>
+            </a:r>
+            <a:r>
+              <a:rPr lang="en-GB" sz="1600" dirty="0">
+                <a:solidFill>
+                  <a:schemeClr val="tx1"/>
+                </a:solidFill>
+                <a:latin typeface="Calibri" pitchFamily="34" charset="0"/>
+                <a:ea typeface="Calibri" pitchFamily="34" charset="-122"/>
+                <a:cs typeface="Calibri" pitchFamily="34" charset="-120"/>
+              </a:rPr>
+              <a:t>, 87(1), p.e12148.</a:t>
+            </a:r>
+          </a:p>
+          <a:p>
+            <a:pPr marL="342900" indent="-342900">
+              <a:spcAft>
+                <a:spcPts val="1800"/>
+              </a:spcAft>
+              <a:buNone/>
+            </a:pPr>
+            <a:r>
+              <a:rPr lang="en-GB" sz="1600" dirty="0">
+                <a:solidFill>
+                  <a:schemeClr val="tx1"/>
+                </a:solidFill>
+                <a:latin typeface="Calibri" pitchFamily="34" charset="0"/>
+                <a:ea typeface="Calibri" pitchFamily="34" charset="-122"/>
+                <a:cs typeface="Calibri" pitchFamily="34" charset="-120"/>
+              </a:rPr>
+              <a:t>Chisango, G. and Marongwe, N., 2021. The digital divide at three disadvantaged secondary schools in Gauteng, South Africa. </a:t>
+            </a:r>
+            <a:r>
+              <a:rPr lang="en-GB" sz="1600" i="1" dirty="0">
+                <a:solidFill>
+                  <a:schemeClr val="tx1"/>
+                </a:solidFill>
+                <a:latin typeface="Calibri" pitchFamily="34" charset="0"/>
+                <a:ea typeface="Calibri" pitchFamily="34" charset="-122"/>
+                <a:cs typeface="Calibri" pitchFamily="34" charset="-120"/>
+              </a:rPr>
+              <a:t>Journal of Education (University of KwaZulu-Natal)</a:t>
+            </a:r>
+            <a:r>
+              <a:rPr lang="en-GB" sz="1600" dirty="0">
+                <a:solidFill>
+                  <a:schemeClr val="tx1"/>
+                </a:solidFill>
+                <a:latin typeface="Calibri" pitchFamily="34" charset="0"/>
+                <a:ea typeface="Calibri" pitchFamily="34" charset="-122"/>
+                <a:cs typeface="Calibri" pitchFamily="34" charset="-120"/>
+              </a:rPr>
+              <a:t>, (82), pp.149-165.</a:t>
+            </a:r>
+          </a:p>
+        </p:txBody>
+      </p:sp>
+      <p:sp>
+        <p:nvSpPr>
+          <p:cNvPr id="34" name="Slide Number Placeholder 0"/>
+          <p:cNvSpPr>
+            <a:spLocks noGrp="1"/>
+          </p:cNvSpPr>
+          <p:nvPr>
+            <p:ph type="sldNum" sz="quarter" idx="4294967295"/>
+          </p:nvPr>
+        </p:nvSpPr>
+        <p:spPr>
+          <a:xfrm>
+            <a:off x="8229600" y="4754880"/>
+            <a:ext cx="457200" cy="274320"/>
+          </a:xfrm>
+          <a:prstGeom prst="rect">
+            <a:avLst/>
+          </a:prstGeom>
+          <a:extLst>
+            <a:ext uri="{C572A759-6A51-4108-AA02-DFA0A04FC94B}">
+              <ma14:wrappingTextBoxFlag xmlns="" xmlns:ma14="http://schemas.microsoft.com/office/mac/drawingml/2011/main" val="0"/>
+            </a:ext>
+          </a:extLst>
+        </p:spPr>
+        <p:txBody>
+          <a:bodyPr/>
+          <a:lstStyle>
+            <a:lvl1pPr>
+              <a:defRPr sz="1000">
+                <a:solidFill>
+                  <a:schemeClr val="tx2"/>
+                </a:solidFill>
+              </a:defRPr>
+            </a:lvl1pPr>
+          </a:lstStyle>
+          <a:p>
+            <a:pPr algn="l"/>
+            <a:fld id="{F7021451-1387-4CA6-816F-3879F97B5CBC}" type="slidenum">
+              <a:rPr lang="en-US" b="0"/>
+              <a:t>8</a:t>
+            </a:fld>
+            <a:endParaRPr lang="en-US"/>
+          </a:p>
+        </p:txBody>
+      </p:sp>
+    </p:spTree>
+    <p:extLst>
+      <p:ext uri="{BB962C8B-B14F-4D97-AF65-F5344CB8AC3E}">
+        <p14:creationId xmlns:p14="http://schemas.microsoft.com/office/powerpoint/2010/main" val="1714573709"/>
+      </p:ext>
+    </p:extLst>
+  </p:cSld>
+  <p:clrMapOvr>
+    <a:masterClrMapping/>
+  </p:clrMapOvr>
+</p:sld>
+</file>
+
+<file path=ppt/slides/slide9.xml><?xml version="1.0" encoding="utf-8"?>
 <p:sld xmlns:a="http://schemas.openxmlformats.org/drawingml/2006/main" xmlns:r="http://schemas.openxmlformats.org/officeDocument/2006/relationships" xmlns:p="http://schemas.openxmlformats.org/presentationml/2006/main">
   <p:cSld name="Slide 7">
     <p:spTree>
@@ -6875,9 +8695,11 @@
       <p:sp>
         <p:nvSpPr>
           <p:cNvPr id="2" name="Text 0"/>
-          <p:cNvSpPr/>
+          <p:cNvSpPr>
+            <a:spLocks noGrp="1"/>
+          </p:cNvSpPr>
           <p:nvPr>
-            <p:ph idx="100" type="title" hasCustomPrompt="1"/>
+            <p:ph type="title" idx="100" hasCustomPrompt="1"/>
           </p:nvPr>
         </p:nvSpPr>
         <p:spPr>
@@ -6895,7 +8717,7 @@
           <a:bodyPr wrap="square" lIns="0" tIns="0" rIns="0" bIns="0" rtlCol="0" anchor="t"/>
           <a:lstStyle/>
           <a:p>
-            <a:pPr algn="l" indent="0" marL="0">
+            <a:pPr marL="0" indent="0" algn="l">
               <a:buNone/>
             </a:pPr>
             <a:r>
@@ -6931,7 +8753,7 @@
           <a:bodyPr wrap="square" lIns="0" tIns="0" rIns="0" bIns="0" rtlCol="0" anchor="ctr"/>
           <a:lstStyle/>
           <a:p>
-            <a:pPr indent="0" marL="0">
+            <a:pPr marL="0" indent="0">
               <a:buNone/>
             </a:pPr>
             <a:r>
@@ -6952,7 +8774,7 @@
       <p:sp>
         <p:nvSpPr>
           <p:cNvPr id="4" name="Text 2">
-            <a:hlinkClick r:id="rId1" tooltip=""/>
+            <a:hlinkClick r:id="rId3"/>
           </p:cNvPr>
           <p:cNvSpPr txBox="1"/>
           <p:nvPr/>
@@ -6972,7 +8794,7 @@
           <a:bodyPr wrap="square" lIns="0" tIns="0" rIns="0" bIns="0" rtlCol="0" anchor="ctr"/>
           <a:lstStyle/>
           <a:p>
-            <a:pPr indent="0" marL="0">
+            <a:pPr marL="0" indent="0">
               <a:buNone/>
             </a:pPr>
             <a:r>
@@ -6983,7 +8805,7 @@
                 <a:latin typeface="Calibri" pitchFamily="34" charset="0"/>
                 <a:ea typeface="Calibri" pitchFamily="34" charset="-122"/>
                 <a:cs typeface="Calibri" pitchFamily="34" charset="-120"/>
-                <a:hlinkClick r:id="rId1" invalidUrl="" action="" tgtFrame="" tooltip="" history="1" highlightClick="0" endSnd="0">
+                <a:hlinkClick r:id="rId3">
                   <a:extLst>
                     <a:ext uri="{A12FA001-AC4F-418D-AE19-62706E023703}">
                       <ahyp:hlinkClr xmlns:ahyp="http://schemas.microsoft.com/office/drawing/2018/hyperlinkcolor" val="tx"/>
@@ -7021,6 +8843,13 @@
             <a:prstDash val="solid"/>
           </a:ln>
         </p:spPr>
+        <p:txBody>
+          <a:bodyPr/>
+          <a:lstStyle/>
+          <a:p>
+            <a:endParaRPr lang="en-US"/>
+          </a:p>
+        </p:txBody>
       </p:sp>
       <p:sp>
         <p:nvSpPr>
@@ -7046,6 +8875,13 @@
             <a:prstDash val="solid"/>
           </a:ln>
         </p:spPr>
+        <p:txBody>
+          <a:bodyPr/>
+          <a:lstStyle/>
+          <a:p>
+            <a:endParaRPr lang="en-US"/>
+          </a:p>
+        </p:txBody>
       </p:sp>
     </p:spTree>
   </p:cSld>
@@ -7348,4 +9184,339 @@
     </a:ext>
   </a:extLst>
 </a:theme>
+</file>
+
+<file path=ppt/theme/theme2.xml><?xml version="1.0" encoding="utf-8"?>
+<a:theme xmlns:a="http://schemas.openxmlformats.org/drawingml/2006/main" name="Office Theme">
+  <a:themeElements>
+    <a:clrScheme name="Office">
+      <a:dk1>
+        <a:sysClr val="windowText" lastClr="000000"/>
+      </a:dk1>
+      <a:lt1>
+        <a:sysClr val="window" lastClr="FFFFFF"/>
+      </a:lt1>
+      <a:dk2>
+        <a:srgbClr val="0E2841"/>
+      </a:dk2>
+      <a:lt2>
+        <a:srgbClr val="E8E8E8"/>
+      </a:lt2>
+      <a:accent1>
+        <a:srgbClr val="156082"/>
+      </a:accent1>
+      <a:accent2>
+        <a:srgbClr val="E97132"/>
+      </a:accent2>
+      <a:accent3>
+        <a:srgbClr val="196B24"/>
+      </a:accent3>
+      <a:accent4>
+        <a:srgbClr val="0F9ED5"/>
+      </a:accent4>
+      <a:accent5>
+        <a:srgbClr val="A02B93"/>
+      </a:accent5>
+      <a:accent6>
+        <a:srgbClr val="4EA72E"/>
+      </a:accent6>
+      <a:hlink>
+        <a:srgbClr val="467886"/>
+      </a:hlink>
+      <a:folHlink>
+        <a:srgbClr val="96607D"/>
+      </a:folHlink>
+    </a:clrScheme>
+    <a:fontScheme name="Office">
+      <a:majorFont>
+        <a:latin typeface="Aptos Display" panose="02110004020202020204"/>
+        <a:ea typeface=""/>
+        <a:cs typeface=""/>
+        <a:font script="Jpan" typeface="游ゴシック Light"/>
+        <a:font script="Hang" typeface="맑은 고딕"/>
+        <a:font script="Hans" typeface="等线 Light"/>
+        <a:font script="Hant" typeface="新細明體"/>
+        <a:font script="Arab" typeface="Times New Roman"/>
+        <a:font script="Hebr" typeface="Times New Roman"/>
+        <a:font script="Thai" typeface="Angsana New"/>
+        <a:font script="Ethi" typeface="Nyala"/>
+        <a:font script="Beng" typeface="Vrinda"/>
+        <a:font script="Gujr" typeface="Shruti"/>
+        <a:font script="Khmr" typeface="MoolBoran"/>
+        <a:font script="Knda" typeface="Tunga"/>
+        <a:font script="Guru" typeface="Raavi"/>
+        <a:font script="Cans" typeface="Euphemia"/>
+        <a:font script="Cher" typeface="Plantagenet Cherokee"/>
+        <a:font script="Yiii" typeface="Microsoft Yi Baiti"/>
+        <a:font script="Tibt" typeface="Microsoft Himalaya"/>
+        <a:font script="Thaa" typeface="MV Boli"/>
+        <a:font script="Deva" typeface="Mangal"/>
+        <a:font script="Telu" typeface="Gautami"/>
+        <a:font script="Taml" typeface="Latha"/>
+        <a:font script="Syrc" typeface="Estrangelo Edessa"/>
+        <a:font script="Orya" typeface="Kalinga"/>
+        <a:font script="Mlym" typeface="Kartika"/>
+        <a:font script="Laoo" typeface="DokChampa"/>
+        <a:font script="Sinh" typeface="Iskoola Pota"/>
+        <a:font script="Mong" typeface="Mongolian Baiti"/>
+        <a:font script="Viet" typeface="Times New Roman"/>
+        <a:font script="Uigh" typeface="Microsoft Uighur"/>
+        <a:font script="Geor" typeface="Sylfaen"/>
+        <a:font script="Armn" typeface="Arial"/>
+        <a:font script="Bugi" typeface="Leelawadee UI"/>
+        <a:font script="Bopo" typeface="Microsoft JhengHei"/>
+        <a:font script="Java" typeface="Javanese Text"/>
+        <a:font script="Lisu" typeface="Segoe UI"/>
+        <a:font script="Mymr" typeface="Myanmar Text"/>
+        <a:font script="Nkoo" typeface="Ebrima"/>
+        <a:font script="Olck" typeface="Nirmala UI"/>
+        <a:font script="Osma" typeface="Ebrima"/>
+        <a:font script="Phag" typeface="Phagspa"/>
+        <a:font script="Syrn" typeface="Estrangelo Edessa"/>
+        <a:font script="Syrj" typeface="Estrangelo Edessa"/>
+        <a:font script="Syre" typeface="Estrangelo Edessa"/>
+        <a:font script="Sora" typeface="Nirmala UI"/>
+        <a:font script="Tale" typeface="Microsoft Tai Le"/>
+        <a:font script="Talu" typeface="Microsoft New Tai Lue"/>
+        <a:font script="Tfng" typeface="Ebrima"/>
+      </a:majorFont>
+      <a:minorFont>
+        <a:latin typeface="Aptos" panose="02110004020202020204"/>
+        <a:ea typeface=""/>
+        <a:cs typeface=""/>
+        <a:font script="Jpan" typeface="游ゴシック"/>
+        <a:font script="Hang" typeface="맑은 고딕"/>
+        <a:font script="Hans" typeface="等线"/>
+        <a:font script="Hant" typeface="新細明體"/>
+        <a:font script="Arab" typeface="Arial"/>
+        <a:font script="Hebr" typeface="Arial"/>
+        <a:font script="Thai" typeface="Cordia New"/>
+        <a:font script="Ethi" typeface="Nyala"/>
+        <a:font script="Beng" typeface="Vrinda"/>
+        <a:font script="Gujr" typeface="Shruti"/>
+        <a:font script="Khmr" typeface="DaunPenh"/>
+        <a:font script="Knda" typeface="Tunga"/>
+        <a:font script="Guru" typeface="Raavi"/>
+        <a:font script="Cans" typeface="Euphemia"/>
+        <a:font script="Cher" typeface="Plantagenet Cherokee"/>
+        <a:font script="Yiii" typeface="Microsoft Yi Baiti"/>
+        <a:font script="Tibt" typeface="Microsoft Himalaya"/>
+        <a:font script="Thaa" typeface="MV Boli"/>
+        <a:font script="Deva" typeface="Mangal"/>
+        <a:font script="Telu" typeface="Gautami"/>
+        <a:font script="Taml" typeface="Latha"/>
+        <a:font script="Syrc" typeface="Estrangelo Edessa"/>
+        <a:font script="Orya" typeface="Kalinga"/>
+        <a:font script="Mlym" typeface="Kartika"/>
+        <a:font script="Laoo" typeface="DokChampa"/>
+        <a:font script="Sinh" typeface="Iskoola Pota"/>
+        <a:font script="Mong" typeface="Mongolian Baiti"/>
+        <a:font script="Viet" typeface="Arial"/>
+        <a:font script="Uigh" typeface="Microsoft Uighur"/>
+        <a:font script="Geor" typeface="Sylfaen"/>
+        <a:font script="Armn" typeface="Arial"/>
+        <a:font script="Bugi" typeface="Leelawadee UI"/>
+        <a:font script="Bopo" typeface="Microsoft JhengHei"/>
+        <a:font script="Java" typeface="Javanese Text"/>
+        <a:font script="Lisu" typeface="Segoe UI"/>
+        <a:font script="Mymr" typeface="Myanmar Text"/>
+        <a:font script="Nkoo" typeface="Ebrima"/>
+        <a:font script="Olck" typeface="Nirmala UI"/>
+        <a:font script="Osma" typeface="Ebrima"/>
+        <a:font script="Phag" typeface="Phagspa"/>
+        <a:font script="Syrn" typeface="Estrangelo Edessa"/>
+        <a:font script="Syrj" typeface="Estrangelo Edessa"/>
+        <a:font script="Syre" typeface="Estrangelo Edessa"/>
+        <a:font script="Sora" typeface="Nirmala UI"/>
+        <a:font script="Tale" typeface="Microsoft Tai Le"/>
+        <a:font script="Talu" typeface="Microsoft New Tai Lue"/>
+        <a:font script="Tfng" typeface="Ebrima"/>
+      </a:minorFont>
+    </a:fontScheme>
+    <a:fmtScheme name="Office">
+      <a:fillStyleLst>
+        <a:solidFill>
+          <a:schemeClr val="phClr"/>
+        </a:solidFill>
+        <a:gradFill rotWithShape="1">
+          <a:gsLst>
+            <a:gs pos="0">
+              <a:schemeClr val="phClr">
+                <a:lumMod val="110000"/>
+                <a:satMod val="105000"/>
+                <a:tint val="67000"/>
+              </a:schemeClr>
+            </a:gs>
+            <a:gs pos="50000">
+              <a:schemeClr val="phClr">
+                <a:lumMod val="105000"/>
+                <a:satMod val="103000"/>
+                <a:tint val="73000"/>
+              </a:schemeClr>
+            </a:gs>
+            <a:gs pos="100000">
+              <a:schemeClr val="phClr">
+                <a:lumMod val="105000"/>
+                <a:satMod val="109000"/>
+                <a:tint val="81000"/>
+              </a:schemeClr>
+            </a:gs>
+          </a:gsLst>
+          <a:lin ang="5400000" scaled="0"/>
+        </a:gradFill>
+        <a:gradFill rotWithShape="1">
+          <a:gsLst>
+            <a:gs pos="0">
+              <a:schemeClr val="phClr">
+                <a:satMod val="103000"/>
+                <a:lumMod val="102000"/>
+                <a:tint val="94000"/>
+              </a:schemeClr>
+            </a:gs>
+            <a:gs pos="50000">
+              <a:schemeClr val="phClr">
+                <a:satMod val="110000"/>
+                <a:lumMod val="100000"/>
+                <a:shade val="100000"/>
+              </a:schemeClr>
+            </a:gs>
+            <a:gs pos="100000">
+              <a:schemeClr val="phClr">
+                <a:lumMod val="99000"/>
+                <a:satMod val="120000"/>
+                <a:shade val="78000"/>
+              </a:schemeClr>
+            </a:gs>
+          </a:gsLst>
+          <a:lin ang="5400000" scaled="0"/>
+        </a:gradFill>
+      </a:fillStyleLst>
+      <a:lnStyleLst>
+        <a:ln w="12700" cap="flat" cmpd="sng" algn="ctr">
+          <a:solidFill>
+            <a:schemeClr val="phClr"/>
+          </a:solidFill>
+          <a:prstDash val="solid"/>
+          <a:miter lim="800000"/>
+        </a:ln>
+        <a:ln w="19050" cap="flat" cmpd="sng" algn="ctr">
+          <a:solidFill>
+            <a:schemeClr val="phClr"/>
+          </a:solidFill>
+          <a:prstDash val="solid"/>
+          <a:miter lim="800000"/>
+        </a:ln>
+        <a:ln w="25400" cap="flat" cmpd="sng" algn="ctr">
+          <a:solidFill>
+            <a:schemeClr val="phClr"/>
+          </a:solidFill>
+          <a:prstDash val="solid"/>
+          <a:miter lim="800000"/>
+        </a:ln>
+      </a:lnStyleLst>
+      <a:effectStyleLst>
+        <a:effectStyle>
+          <a:effectLst/>
+        </a:effectStyle>
+        <a:effectStyle>
+          <a:effectLst/>
+        </a:effectStyle>
+        <a:effectStyle>
+          <a:effectLst>
+            <a:outerShdw blurRad="57150" dist="19050" dir="5400000" algn="ctr" rotWithShape="0">
+              <a:srgbClr val="000000">
+                <a:alpha val="63000"/>
+              </a:srgbClr>
+            </a:outerShdw>
+          </a:effectLst>
+        </a:effectStyle>
+      </a:effectStyleLst>
+      <a:bgFillStyleLst>
+        <a:solidFill>
+          <a:schemeClr val="phClr"/>
+        </a:solidFill>
+        <a:solidFill>
+          <a:schemeClr val="phClr">
+            <a:tint val="95000"/>
+            <a:satMod val="170000"/>
+          </a:schemeClr>
+        </a:solidFill>
+        <a:gradFill rotWithShape="1">
+          <a:gsLst>
+            <a:gs pos="0">
+              <a:schemeClr val="phClr">
+                <a:tint val="93000"/>
+                <a:satMod val="150000"/>
+                <a:shade val="98000"/>
+                <a:lumMod val="102000"/>
+              </a:schemeClr>
+            </a:gs>
+            <a:gs pos="50000">
+              <a:schemeClr val="phClr">
+                <a:tint val="98000"/>
+                <a:satMod val="130000"/>
+                <a:shade val="90000"/>
+                <a:lumMod val="103000"/>
+              </a:schemeClr>
+            </a:gs>
+            <a:gs pos="100000">
+              <a:schemeClr val="phClr">
+                <a:shade val="63000"/>
+                <a:satMod val="120000"/>
+              </a:schemeClr>
+            </a:gs>
+          </a:gsLst>
+          <a:lin ang="5400000" scaled="0"/>
+        </a:gradFill>
+      </a:bgFillStyleLst>
+    </a:fmtScheme>
+  </a:themeElements>
+  <a:objectDefaults>
+    <a:lnDef>
+      <a:spPr/>
+      <a:bodyPr/>
+      <a:lstStyle/>
+      <a:style>
+        <a:lnRef idx="2">
+          <a:schemeClr val="accent1"/>
+        </a:lnRef>
+        <a:fillRef idx="0">
+          <a:schemeClr val="accent1"/>
+        </a:fillRef>
+        <a:effectRef idx="1">
+          <a:schemeClr val="accent1"/>
+        </a:effectRef>
+        <a:fontRef idx="minor">
+          <a:schemeClr val="tx1"/>
+        </a:fontRef>
+      </a:style>
+    </a:lnDef>
+  </a:objectDefaults>
+  <a:extraClrSchemeLst/>
+  <a:extLst>
+    <a:ext uri="{05A4C25C-085E-4340-85A3-A5531E510DB2}">
+      <thm15:themeFamily xmlns:thm15="http://schemas.microsoft.com/office/thememl/2012/main" name="Office Theme" id="{2E142A2C-CD16-42D6-873A-C26D2A0506FA}" vid="{1BDDFF52-6CD6-40A5-AB3C-68EB2F1E4D0A}"/>
+    </a:ext>
+  </a:extLst>
+</a:theme>
+</file>
+
+<file path=ppt/webextensions/taskpanes.xml><?xml version="1.0" encoding="utf-8"?>
+<wetp:taskpanes xmlns:wetp="http://schemas.microsoft.com/office/webextensions/taskpanes/2010/11">
+  <wetp:taskpane dockstate="right" visibility="0" width="350" row="5">
+    <wetp:webextensionref xmlns:r="http://schemas.openxmlformats.org/officeDocument/2006/relationships" r:id="rId1"/>
+  </wetp:taskpane>
+</wetp:taskpanes>
+</file>
+
+<file path=ppt/webextensions/webextension1.xml><?xml version="1.0" encoding="utf-8"?>
+<we:webextension xmlns:we="http://schemas.microsoft.com/office/webextensions/webextension/2010/11" id="{908ACEBF-340C-47F3-9549-061A126E02F4}">
+  <we:reference id="wa200002492" version="1.0.0.3" store="en-US" storeType="OMEX"/>
+  <we:alternateReferences>
+    <we:reference id="WA200002492" version="1.0.0.3" store="" storeType="OMEX"/>
+  </we:alternateReferences>
+  <we:properties/>
+  <we:bindings/>
+  <we:snapshot xmlns:r="http://schemas.openxmlformats.org/officeDocument/2006/relationships"/>
+</we:webextension>
 </file>
--- a/Algorithms_Flowcharts_Presentation_CLT.pptx
+++ b/Algorithms_Flowcharts_Presentation_CLT.pptx
@@ -1154,7 +1154,7 @@
           </a:prstGeom>
           <a:extLst>
             <a:ext uri="{C572A759-6A51-4108-AA02-DFA0A04FC94B}">
-              <ma14:wrappingTextBoxFlag xmlns:ma14="http://schemas.microsoft.com/office/mac/drawingml/2011/main" xmlns="" val="0"/>
+              <ma14:wrappingTextBoxFlag xmlns="" xmlns:ma14="http://schemas.microsoft.com/office/mac/drawingml/2011/main" val="0"/>
             </a:ext>
           </a:extLst>
         </p:spPr>
@@ -1303,7 +1303,7 @@
           </a:prstGeom>
           <a:extLst>
             <a:ext uri="{C572A759-6A51-4108-AA02-DFA0A04FC94B}">
-              <ma14:wrappingTextBoxFlag xmlns:ma14="http://schemas.microsoft.com/office/mac/drawingml/2011/main" xmlns="" val="0"/>
+              <ma14:wrappingTextBoxFlag xmlns="" xmlns:ma14="http://schemas.microsoft.com/office/mac/drawingml/2011/main" val="0"/>
             </a:ext>
           </a:extLst>
         </p:spPr>
@@ -3024,7 +3024,7 @@
           </a:prstGeom>
           <a:extLst>
             <a:ext uri="{C572A759-6A51-4108-AA02-DFA0A04FC94B}">
-              <ma14:wrappingTextBoxFlag xmlns:ma14="http://schemas.microsoft.com/office/mac/drawingml/2011/main" xmlns="" val="0"/>
+              <ma14:wrappingTextBoxFlag xmlns="" xmlns:ma14="http://schemas.microsoft.com/office/mac/drawingml/2011/main" val="0"/>
             </a:ext>
           </a:extLst>
         </p:spPr>
@@ -4222,7 +4222,7 @@
           </a:prstGeom>
           <a:extLst>
             <a:ext uri="{C572A759-6A51-4108-AA02-DFA0A04FC94B}">
-              <ma14:wrappingTextBoxFlag xmlns:ma14="http://schemas.microsoft.com/office/mac/drawingml/2011/main" xmlns="" val="0"/>
+              <ma14:wrappingTextBoxFlag xmlns="" xmlns:ma14="http://schemas.microsoft.com/office/mac/drawingml/2011/main" val="0"/>
             </a:ext>
           </a:extLst>
         </p:spPr>
@@ -4916,7 +4916,7 @@
                 <a:ea typeface="Calibri" pitchFamily="34" charset="-122"/>
                 <a:cs typeface="Calibri" pitchFamily="34" charset="-120"/>
               </a:rPr>
-              <a:t>Exit tickets in Lessons 1–4; a Lesson 5 summative with rubric and memo.</a:t>
+              <a:t>Exit tickets in Lessons 1-4; a Lesson 5 summative with rubric and memo.</a:t>
             </a:r>
             <a:endParaRPr lang="en-US" sz="1400" dirty="0"/>
           </a:p>
@@ -5179,7 +5179,7 @@
           </a:prstGeom>
           <a:extLst>
             <a:ext uri="{C572A759-6A51-4108-AA02-DFA0A04FC94B}">
-              <ma14:wrappingTextBoxFlag xmlns:ma14="http://schemas.microsoft.com/office/mac/drawingml/2011/main" xmlns="" val="0"/>
+              <ma14:wrappingTextBoxFlag xmlns="" xmlns:ma14="http://schemas.microsoft.com/office/mac/drawingml/2011/main" val="0"/>
             </a:ext>
           </a:extLst>
         </p:spPr>
@@ -6272,7 +6272,7 @@
           </a:prstGeom>
           <a:extLst>
             <a:ext uri="{C572A759-6A51-4108-AA02-DFA0A04FC94B}">
-              <ma14:wrappingTextBoxFlag xmlns="" xmlns:ma14="http://schemas.microsoft.com/office/mac/drawingml/2011/main" val="0"/>
+              <ma14:wrappingTextBoxFlag xmlns:ma14="http://schemas.microsoft.com/office/mac/drawingml/2011/main" xmlns="" val="0"/>
             </a:ext>
           </a:extLst>
         </p:spPr>
@@ -6417,7 +6417,7 @@
         </p:nvGraphicFramePr>
         <p:xfrm>
           <a:off x="457200" y="1261872"/>
-          <a:ext cx="8229600" cy="914400"/>
+          <a:ext cx="8229600" cy="3364992"/>
         </p:xfrm>
         <a:graphic>
           <a:graphicData uri="http://schemas.openxmlformats.org/drawingml/2006/table">
@@ -7464,7 +7464,7 @@
           </a:prstGeom>
           <a:extLst>
             <a:ext uri="{C572A759-6A51-4108-AA02-DFA0A04FC94B}">
-              <ma14:wrappingTextBoxFlag xmlns:ma14="http://schemas.microsoft.com/office/mac/drawingml/2011/main" xmlns="" val="0"/>
+              <ma14:wrappingTextBoxFlag xmlns="" xmlns:ma14="http://schemas.microsoft.com/office/mac/drawingml/2011/main" val="0"/>
             </a:ext>
           </a:extLst>
         </p:spPr>
@@ -8384,7 +8384,7 @@
           </a:prstGeom>
           <a:extLst>
             <a:ext uri="{C572A759-6A51-4108-AA02-DFA0A04FC94B}">
-              <ma14:wrappingTextBoxFlag xmlns:ma14="http://schemas.microsoft.com/office/mac/drawingml/2011/main" xmlns="" val="0"/>
+              <ma14:wrappingTextBoxFlag xmlns="" xmlns:ma14="http://schemas.microsoft.com/office/mac/drawingml/2011/main" val="0"/>
             </a:ext>
           </a:extLst>
         </p:spPr>
@@ -8637,7 +8637,7 @@
           </a:prstGeom>
           <a:extLst>
             <a:ext uri="{C572A759-6A51-4108-AA02-DFA0A04FC94B}">
-              <ma14:wrappingTextBoxFlag xmlns="" xmlns:ma14="http://schemas.microsoft.com/office/mac/drawingml/2011/main" val="0"/>
+              <ma14:wrappingTextBoxFlag xmlns:ma14="http://schemas.microsoft.com/office/mac/drawingml/2011/main" xmlns="" val="0"/>
             </a:ext>
           </a:extLst>
         </p:spPr>
